--- a/examples/consulting-ai-transformation/run/slides/s03-operating-model/deliverables/slide.pptx
+++ b/examples/consulting-ai-transformation/run/slides/s03-operating-model/deliverables/slide.pptx
@@ -505,7 +505,11 @@
               <a:t>This is an illustrative planning scenario. Twenty paired tasks represent one research task from each of twenty pilot engagements, with ten tasks at the week-eight interim review. The sampled 95% claim-verification gate measures pilot quality. Every client claim still requires expert sign-off and every client release requires engagement-lead approval.
 The two curved feedback paths are editable native freeforms. They preserve the observed direction and curve geometry, but moving the table or its columns in Office does not automatically reattach these paths.
 [SlidePoise sources]
-Generated target visual: /Users/henry/Codes/AI_slide_drafting/output/showcase-revisions/consulting-v3-authoring/slides/s03-operating-model/work/accepted-slide.png</a:t>
+Generated target visual: /private/tmp/.slidepoise-rebuild-h51errnw/slides/s03-operating-model/work/accepted-slide.png
+Canonical asset remix-file-search-line: /Users/henry/Codes/AI_slide_drafting/examples/consulting-ai-transformation/run/work/icon-cache/file-search/remix-file-search-line.svg
+Canonical asset remix-draft-line: /Users/henry/Codes/AI_slide_drafting/examples/consulting-ai-transformation/run/work/icon-cache/draft/remix-draft-line.svg
+Canonical asset remix-shield-check-line: /Users/henry/Codes/AI_slide_drafting/examples/consulting-ai-transformation/run/work/icon-cache/shield-check/remix-shield-check-line.svg
+Canonical asset remix-send-plane-2-line: /Users/henry/Codes/AI_slide_drafting/examples/consulting-ai-transformation/run/work/icon-cache/send-plane-2/remix-send-plane-2-line.svg</a:t>
             </a:r>
             <a:endParaRPr lang="en-US" dirty="0"/>
           </a:p>
@@ -1219,20 +1223,20 @@
       </p:grpSpPr>
       <p:sp>
         <p:nvSpPr>
-          <p:cNvPr id="2" name="introduction-rule"/>
+          <p:cNvPr id="2" name="bottom-divider"/>
           <p:cNvSpPr/>
           <p:nvPr/>
         </p:nvSpPr>
         <p:spPr>
           <a:xfrm>
-            <a:off x="304800" y="1454150"/>
-            <a:ext cx="11582400" cy="12700"/>
+            <a:off x="5715000" y="4851400"/>
+            <a:ext cx="6350" cy="685800"/>
           </a:xfrm>
           <a:prstGeom prst="rect">
             <a:avLst/>
           </a:prstGeom>
           <a:solidFill>
-            <a:srgbClr val="999999"/>
+            <a:srgbClr val="B7BCC2"/>
           </a:solidFill>
           <a:ln w="12700">
             <a:solidFill>
@@ -1246,141 +1250,14 @@
       </p:sp>
       <p:sp>
         <p:nvSpPr>
-          <p:cNvPr id="3" name="stage-1"/>
+          <p:cNvPr id="3" name="decision-band"/>
           <p:cNvSpPr/>
           <p:nvPr/>
         </p:nvSpPr>
         <p:spPr>
           <a:xfrm>
-            <a:off x="565150" y="1663700"/>
-            <a:ext cx="1619250" cy="577850"/>
-          </a:xfrm>
-          <a:prstGeom prst="rect">
-            <a:avLst/>
-          </a:prstGeom>
-          <a:solidFill>
-            <a:srgbClr val="FFFFFF"/>
-          </a:solidFill>
-          <a:ln w="12700">
-            <a:solidFill>
-              <a:srgbClr val="FD5108"/>
-            </a:solidFill>
-            <a:prstDash val="solid"/>
-          </a:ln>
-        </p:spPr>
-      </p:sp>
-      <p:sp>
-        <p:nvSpPr>
-          <p:cNvPr id="4" name="stage-2"/>
-          <p:cNvSpPr/>
-          <p:nvPr/>
-        </p:nvSpPr>
-        <p:spPr>
-          <a:xfrm>
-            <a:off x="2819400" y="1663700"/>
-            <a:ext cx="1606550" cy="577850"/>
-          </a:xfrm>
-          <a:prstGeom prst="rect">
-            <a:avLst/>
-          </a:prstGeom>
-          <a:solidFill>
-            <a:srgbClr val="FFFFFF"/>
-          </a:solidFill>
-          <a:ln w="12700">
-            <a:solidFill>
-              <a:srgbClr val="FD5108"/>
-            </a:solidFill>
-            <a:prstDash val="solid"/>
-          </a:ln>
-        </p:spPr>
-      </p:sp>
-      <p:sp>
-        <p:nvSpPr>
-          <p:cNvPr id="5" name="stage-3"/>
-          <p:cNvSpPr/>
-          <p:nvPr/>
-        </p:nvSpPr>
-        <p:spPr>
-          <a:xfrm>
-            <a:off x="5041900" y="1663700"/>
-            <a:ext cx="1619250" cy="577850"/>
-          </a:xfrm>
-          <a:prstGeom prst="rect">
-            <a:avLst/>
-          </a:prstGeom>
-          <a:solidFill>
-            <a:srgbClr val="FFFFFF"/>
-          </a:solidFill>
-          <a:ln w="12700">
-            <a:solidFill>
-              <a:srgbClr val="FD5108"/>
-            </a:solidFill>
-            <a:prstDash val="solid"/>
-          </a:ln>
-        </p:spPr>
-      </p:sp>
-      <p:sp>
-        <p:nvSpPr>
-          <p:cNvPr id="6" name="stage-4"/>
-          <p:cNvSpPr/>
-          <p:nvPr/>
-        </p:nvSpPr>
-        <p:spPr>
-          <a:xfrm>
-            <a:off x="7264400" y="1663700"/>
-            <a:ext cx="1803400" cy="577850"/>
-          </a:xfrm>
-          <a:prstGeom prst="rect">
-            <a:avLst/>
-          </a:prstGeom>
-          <a:solidFill>
-            <a:srgbClr val="FFFFFF"/>
-          </a:solidFill>
-          <a:ln w="12700">
-            <a:solidFill>
-              <a:srgbClr val="FD5108"/>
-            </a:solidFill>
-            <a:prstDash val="solid"/>
-          </a:ln>
-        </p:spPr>
-      </p:sp>
-      <p:sp>
-        <p:nvSpPr>
-          <p:cNvPr id="7" name="shared-divider"/>
-          <p:cNvSpPr/>
-          <p:nvPr/>
-        </p:nvSpPr>
-        <p:spPr>
-          <a:xfrm>
-            <a:off x="9620250" y="3492500"/>
-            <a:ext cx="2260600" cy="6350"/>
-          </a:xfrm>
-          <a:prstGeom prst="rect">
-            <a:avLst/>
-          </a:prstGeom>
-          <a:solidFill>
-            <a:srgbClr val="B5B5B5"/>
-          </a:solidFill>
-          <a:ln w="12700">
-            <a:solidFill>
-              <a:srgbClr val="FFFFFF">
-                <a:alpha val="0"/>
-              </a:srgbClr>
-            </a:solidFill>
-            <a:prstDash val="solid"/>
-          </a:ln>
-        </p:spPr>
-      </p:sp>
-      <p:sp>
-        <p:nvSpPr>
-          <p:cNvPr id="8" name="decision-band"/>
-          <p:cNvSpPr/>
-          <p:nvPr/>
-        </p:nvSpPr>
-        <p:spPr>
-          <a:xfrm>
-            <a:off x="304800" y="5441950"/>
-            <a:ext cx="11582400" cy="850900"/>
+            <a:off x="292100" y="5708650"/>
+            <a:ext cx="11607800" cy="590550"/>
           </a:xfrm>
           <a:prstGeom prst="rect">
             <a:avLst/>
@@ -1400,14 +1277,14 @@
       </p:sp>
       <p:sp>
         <p:nvSpPr>
-          <p:cNvPr id="9" name="decision-accent"/>
+          <p:cNvPr id="4" name="decision-accent"/>
           <p:cNvSpPr/>
           <p:nvPr/>
         </p:nvSpPr>
         <p:spPr>
           <a:xfrm>
-            <a:off x="304800" y="5441950"/>
-            <a:ext cx="50800" cy="850900"/>
+            <a:off x="292100" y="5708650"/>
+            <a:ext cx="50800" cy="590550"/>
           </a:xfrm>
           <a:prstGeom prst="rect">
             <a:avLst/>
@@ -1427,7 +1304,7 @@
       </p:sp>
       <p:graphicFrame>
         <p:nvGraphicFramePr>
-          <p:cNvPr id="10" name="responsibility-matrix"/>
+          <p:cNvPr id="5" name="responsibility-matrix"/>
           <p:cNvGraphicFramePr>
             <a:graphicFrameLocks noGrp="1"/>
           </p:cNvGraphicFramePr>
@@ -1440,21 +1317,21 @@
           </p:nvPr>
         </p:nvGraphicFramePr>
         <p:xfrm>
-          <a:off x="311150" y="2406650"/>
-          <a:ext cx="9042400" cy="2114550"/>
+          <a:off x="215900" y="2832100"/>
+          <a:ext cx="11658600" cy="1905000"/>
         </p:xfrm>
         <a:graphic>
           <a:graphicData uri="http://schemas.openxmlformats.org/drawingml/2006/table">
             <a:tbl>
               <a:tblPr/>
               <a:tblGrid>
-                <a:gridCol w="1758950"/>
-                <a:gridCol w="1828800"/>
-                <a:gridCol w="1866900"/>
-                <a:gridCol w="1746250"/>
                 <a:gridCol w="1841500"/>
+                <a:gridCol w="2444750"/>
+                <a:gridCol w="2476500"/>
+                <a:gridCol w="2444750"/>
+                <a:gridCol w="2451100"/>
               </a:tblGrid>
-              <a:tr h="349250">
+              <a:tr h="317500">
                 <a:tc>
                   <a:txBody>
                     <a:bodyPr>
@@ -1465,17 +1342,17 @@
                       <a:pPr algn="l" indent="0" marL="0">
                         <a:buNone/>
                       </a:pPr>
-                      <a:endParaRPr lang="en-US" sz="1200" dirty="0">
+                      <a:endParaRPr lang="en-US" sz="950" dirty="0">
                         <a:latin typeface="Arial" charset="0"/>
                         <a:ea typeface="Arial" charset="0"/>
                         <a:cs typeface="Arial" charset="0"/>
                       </a:endParaRPr>
                     </a:p>
                   </a:txBody>
-                  <a:tcPr marL="101600" marR="101600" marT="25400" marB="25400" anchor="ctr">
+                  <a:tcPr marL="101600" marR="101600" marT="38100" marB="38100" anchor="ctr">
                     <a:lnL w="6350" cap="flat" cmpd="sng" algn="ctr">
                       <a:solidFill>
-                        <a:srgbClr val="B5B5B5"/>
+                        <a:srgbClr val="C6C9CD"/>
                       </a:solidFill>
                       <a:prstDash val="solid"/>
                       <a:round/>
@@ -1484,7 +1361,7 @@
                     </a:lnL>
                     <a:lnR w="6350" cap="flat" cmpd="sng" algn="ctr">
                       <a:solidFill>
-                        <a:srgbClr val="B5B5B5"/>
+                        <a:srgbClr val="C6C9CD"/>
                       </a:solidFill>
                       <a:prstDash val="solid"/>
                       <a:round/>
@@ -1493,7 +1370,7 @@
                     </a:lnR>
                     <a:lnT w="6350" cap="flat" cmpd="sng" algn="ctr">
                       <a:solidFill>
-                        <a:srgbClr val="B5B5B5"/>
+                        <a:srgbClr val="C6C9CD"/>
                       </a:solidFill>
                       <a:prstDash val="solid"/>
                       <a:round/>
@@ -1502,7 +1379,7 @@
                     </a:lnT>
                     <a:lnB w="6350" cap="flat" cmpd="sng" algn="ctr">
                       <a:solidFill>
-                        <a:srgbClr val="B5B5B5"/>
+                        <a:srgbClr val="C6C9CD"/>
                       </a:solidFill>
                       <a:prstDash val="solid"/>
                       <a:round/>
@@ -1521,11 +1398,11 @@
                     </a:bodyPr>
                     <a:lstStyle/>
                     <a:p>
-                      <a:pPr algn="l" indent="0" marL="0">
+                      <a:pPr algn="ctr" indent="0" marL="0">
                         <a:buNone/>
                       </a:pPr>
                       <a:r>
-                        <a:rPr lang="en-US" sz="1200" b="1" dirty="0">
+                        <a:rPr lang="en-US" sz="950" b="1" dirty="0">
                           <a:solidFill>
                             <a:srgbClr val="FFFFFF"/>
                           </a:solidFill>
@@ -1535,17 +1412,17 @@
                         </a:rPr>
                         <a:t>Approved sources</a:t>
                       </a:r>
-                      <a:endParaRPr lang="en-US" sz="1200" dirty="0">
+                      <a:endParaRPr lang="en-US" sz="950" dirty="0">
                         <a:latin typeface="Arial" charset="0"/>
                         <a:ea typeface="Arial" charset="0"/>
                         <a:cs typeface="Arial" charset="0"/>
                       </a:endParaRPr>
                     </a:p>
                   </a:txBody>
-                  <a:tcPr marL="101600" marR="101600" marT="25400" marB="25400" anchor="ctr">
+                  <a:tcPr marL="101600" marR="101600" marT="38100" marB="38100" anchor="ctr">
                     <a:lnL w="6350" cap="flat" cmpd="sng" algn="ctr">
                       <a:solidFill>
-                        <a:srgbClr val="B5B5B5"/>
+                        <a:srgbClr val="C6C9CD"/>
                       </a:solidFill>
                       <a:prstDash val="solid"/>
                       <a:round/>
@@ -1554,7 +1431,7 @@
                     </a:lnL>
                     <a:lnR w="6350" cap="flat" cmpd="sng" algn="ctr">
                       <a:solidFill>
-                        <a:srgbClr val="B5B5B5"/>
+                        <a:srgbClr val="C6C9CD"/>
                       </a:solidFill>
                       <a:prstDash val="solid"/>
                       <a:round/>
@@ -1563,7 +1440,7 @@
                     </a:lnR>
                     <a:lnT w="6350" cap="flat" cmpd="sng" algn="ctr">
                       <a:solidFill>
-                        <a:srgbClr val="B5B5B5"/>
+                        <a:srgbClr val="C6C9CD"/>
                       </a:solidFill>
                       <a:prstDash val="solid"/>
                       <a:round/>
@@ -1572,7 +1449,7 @@
                     </a:lnT>
                     <a:lnB w="6350" cap="flat" cmpd="sng" algn="ctr">
                       <a:solidFill>
-                        <a:srgbClr val="B5B5B5"/>
+                        <a:srgbClr val="C6C9CD"/>
                       </a:solidFill>
                       <a:prstDash val="solid"/>
                       <a:round/>
@@ -1591,11 +1468,11 @@
                     </a:bodyPr>
                     <a:lstStyle/>
                     <a:p>
-                      <a:pPr algn="l" indent="0" marL="0">
+                      <a:pPr algn="ctr" indent="0" marL="0">
                         <a:buNone/>
                       </a:pPr>
                       <a:r>
-                        <a:rPr lang="en-US" sz="1200" b="1" dirty="0">
+                        <a:rPr lang="en-US" sz="950" b="1" dirty="0">
                           <a:solidFill>
                             <a:srgbClr val="FFFFFF"/>
                           </a:solidFill>
@@ -1605,17 +1482,17 @@
                         </a:rPr>
                         <a:t>Grounded draft</a:t>
                       </a:r>
-                      <a:endParaRPr lang="en-US" sz="1200" dirty="0">
+                      <a:endParaRPr lang="en-US" sz="950" dirty="0">
                         <a:latin typeface="Arial" charset="0"/>
                         <a:ea typeface="Arial" charset="0"/>
                         <a:cs typeface="Arial" charset="0"/>
                       </a:endParaRPr>
                     </a:p>
                   </a:txBody>
-                  <a:tcPr marL="101600" marR="101600" marT="25400" marB="25400" anchor="ctr">
+                  <a:tcPr marL="101600" marR="101600" marT="38100" marB="38100" anchor="ctr">
                     <a:lnL w="6350" cap="flat" cmpd="sng" algn="ctr">
                       <a:solidFill>
-                        <a:srgbClr val="B5B5B5"/>
+                        <a:srgbClr val="C6C9CD"/>
                       </a:solidFill>
                       <a:prstDash val="solid"/>
                       <a:round/>
@@ -1624,7 +1501,7 @@
                     </a:lnL>
                     <a:lnR w="6350" cap="flat" cmpd="sng" algn="ctr">
                       <a:solidFill>
-                        <a:srgbClr val="B5B5B5"/>
+                        <a:srgbClr val="C6C9CD"/>
                       </a:solidFill>
                       <a:prstDash val="solid"/>
                       <a:round/>
@@ -1633,7 +1510,7 @@
                     </a:lnR>
                     <a:lnT w="6350" cap="flat" cmpd="sng" algn="ctr">
                       <a:solidFill>
-                        <a:srgbClr val="B5B5B5"/>
+                        <a:srgbClr val="C6C9CD"/>
                       </a:solidFill>
                       <a:prstDash val="solid"/>
                       <a:round/>
@@ -1642,7 +1519,7 @@
                     </a:lnT>
                     <a:lnB w="6350" cap="flat" cmpd="sng" algn="ctr">
                       <a:solidFill>
-                        <a:srgbClr val="B5B5B5"/>
+                        <a:srgbClr val="C6C9CD"/>
                       </a:solidFill>
                       <a:prstDash val="solid"/>
                       <a:round/>
@@ -1661,11 +1538,11 @@
                     </a:bodyPr>
                     <a:lstStyle/>
                     <a:p>
-                      <a:pPr algn="l" indent="0" marL="0">
+                      <a:pPr algn="ctr" indent="0" marL="0">
                         <a:buNone/>
                       </a:pPr>
                       <a:r>
-                        <a:rPr lang="en-US" sz="1200" b="1" dirty="0">
+                        <a:rPr lang="en-US" sz="950" b="1" dirty="0">
                           <a:solidFill>
                             <a:srgbClr val="FFFFFF"/>
                           </a:solidFill>
@@ -1675,17 +1552,17 @@
                         </a:rPr>
                         <a:t>Expert review</a:t>
                       </a:r>
-                      <a:endParaRPr lang="en-US" sz="1200" dirty="0">
+                      <a:endParaRPr lang="en-US" sz="950" dirty="0">
                         <a:latin typeface="Arial" charset="0"/>
                         <a:ea typeface="Arial" charset="0"/>
                         <a:cs typeface="Arial" charset="0"/>
                       </a:endParaRPr>
                     </a:p>
                   </a:txBody>
-                  <a:tcPr marL="101600" marR="101600" marT="25400" marB="25400" anchor="ctr">
+                  <a:tcPr marL="101600" marR="101600" marT="38100" marB="38100" anchor="ctr">
                     <a:lnL w="6350" cap="flat" cmpd="sng" algn="ctr">
                       <a:solidFill>
-                        <a:srgbClr val="B5B5B5"/>
+                        <a:srgbClr val="C6C9CD"/>
                       </a:solidFill>
                       <a:prstDash val="solid"/>
                       <a:round/>
@@ -1694,7 +1571,7 @@
                     </a:lnL>
                     <a:lnR w="6350" cap="flat" cmpd="sng" algn="ctr">
                       <a:solidFill>
-                        <a:srgbClr val="B5B5B5"/>
+                        <a:srgbClr val="C6C9CD"/>
                       </a:solidFill>
                       <a:prstDash val="solid"/>
                       <a:round/>
@@ -1703,7 +1580,7 @@
                     </a:lnR>
                     <a:lnT w="6350" cap="flat" cmpd="sng" algn="ctr">
                       <a:solidFill>
-                        <a:srgbClr val="B5B5B5"/>
+                        <a:srgbClr val="C6C9CD"/>
                       </a:solidFill>
                       <a:prstDash val="solid"/>
                       <a:round/>
@@ -1712,7 +1589,7 @@
                     </a:lnT>
                     <a:lnB w="6350" cap="flat" cmpd="sng" algn="ctr">
                       <a:solidFill>
-                        <a:srgbClr val="B5B5B5"/>
+                        <a:srgbClr val="C6C9CD"/>
                       </a:solidFill>
                       <a:prstDash val="solid"/>
                       <a:round/>
@@ -1731,11 +1608,11 @@
                     </a:bodyPr>
                     <a:lstStyle/>
                     <a:p>
-                      <a:pPr algn="l" indent="0" marL="0">
+                      <a:pPr algn="ctr" indent="0" marL="0">
                         <a:buNone/>
                       </a:pPr>
                       <a:r>
-                        <a:rPr lang="en-US" sz="1200" b="1" dirty="0">
+                        <a:rPr lang="en-US" sz="950" b="1" dirty="0">
                           <a:solidFill>
                             <a:srgbClr val="FFFFFF"/>
                           </a:solidFill>
@@ -1745,17 +1622,17 @@
                         </a:rPr>
                         <a:t>Client-ready output</a:t>
                       </a:r>
-                      <a:endParaRPr lang="en-US" sz="1200" dirty="0">
+                      <a:endParaRPr lang="en-US" sz="950" dirty="0">
                         <a:latin typeface="Arial" charset="0"/>
                         <a:ea typeface="Arial" charset="0"/>
                         <a:cs typeface="Arial" charset="0"/>
                       </a:endParaRPr>
                     </a:p>
                   </a:txBody>
-                  <a:tcPr marL="101600" marR="101600" marT="25400" marB="25400" anchor="ctr">
+                  <a:tcPr marL="101600" marR="101600" marT="38100" marB="38100" anchor="ctr">
                     <a:lnL w="6350" cap="flat" cmpd="sng" algn="ctr">
                       <a:solidFill>
-                        <a:srgbClr val="B5B5B5"/>
+                        <a:srgbClr val="C6C9CD"/>
                       </a:solidFill>
                       <a:prstDash val="solid"/>
                       <a:round/>
@@ -1764,7 +1641,7 @@
                     </a:lnL>
                     <a:lnR w="6350" cap="flat" cmpd="sng" algn="ctr">
                       <a:solidFill>
-                        <a:srgbClr val="B5B5B5"/>
+                        <a:srgbClr val="C6C9CD"/>
                       </a:solidFill>
                       <a:prstDash val="solid"/>
                       <a:round/>
@@ -1773,7 +1650,7 @@
                     </a:lnR>
                     <a:lnT w="6350" cap="flat" cmpd="sng" algn="ctr">
                       <a:solidFill>
-                        <a:srgbClr val="B5B5B5"/>
+                        <a:srgbClr val="C6C9CD"/>
                       </a:solidFill>
                       <a:prstDash val="solid"/>
                       <a:round/>
@@ -1782,7 +1659,7 @@
                     </a:lnT>
                     <a:lnB w="6350" cap="flat" cmpd="sng" algn="ctr">
                       <a:solidFill>
-                        <a:srgbClr val="B5B5B5"/>
+                        <a:srgbClr val="C6C9CD"/>
                       </a:solidFill>
                       <a:prstDash val="solid"/>
                       <a:round/>
@@ -1795,7 +1672,7 @@
                   </a:tcPr>
                 </a:tc>
               </a:tr>
-              <a:tr h="412750">
+              <a:tr h="368300">
                 <a:tc>
                   <a:txBody>
                     <a:bodyPr>
@@ -1807,7 +1684,7 @@
                         <a:buNone/>
                       </a:pPr>
                       <a:r>
-                        <a:rPr lang="en-US" sz="1200" b="1" dirty="0">
+                        <a:rPr lang="en-US" sz="950" b="1" dirty="0">
                           <a:solidFill>
                             <a:srgbClr val="000000"/>
                           </a:solidFill>
@@ -1817,17 +1694,17 @@
                         </a:rPr>
                         <a:t>INPUT</a:t>
                       </a:r>
-                      <a:endParaRPr lang="en-US" sz="1200" dirty="0">
+                      <a:endParaRPr lang="en-US" sz="950" dirty="0">
                         <a:latin typeface="Arial" charset="0"/>
                         <a:ea typeface="Arial" charset="0"/>
                         <a:cs typeface="Arial" charset="0"/>
                       </a:endParaRPr>
                     </a:p>
                   </a:txBody>
-                  <a:tcPr marL="101600" marR="101600" marT="25400" marB="25400" anchor="ctr">
+                  <a:tcPr marL="101600" marR="101600" marT="38100" marB="38100" anchor="ctr">
                     <a:lnL w="6350" cap="flat" cmpd="sng" algn="ctr">
                       <a:solidFill>
-                        <a:srgbClr val="B5B5B5"/>
+                        <a:srgbClr val="C6C9CD"/>
                       </a:solidFill>
                       <a:prstDash val="solid"/>
                       <a:round/>
@@ -1836,7 +1713,7 @@
                     </a:lnL>
                     <a:lnR w="6350" cap="flat" cmpd="sng" algn="ctr">
                       <a:solidFill>
-                        <a:srgbClr val="B5B5B5"/>
+                        <a:srgbClr val="C6C9CD"/>
                       </a:solidFill>
                       <a:prstDash val="solid"/>
                       <a:round/>
@@ -1845,7 +1722,7 @@
                     </a:lnR>
                     <a:lnT w="6350" cap="flat" cmpd="sng" algn="ctr">
                       <a:solidFill>
-                        <a:srgbClr val="B5B5B5"/>
+                        <a:srgbClr val="C6C9CD"/>
                       </a:solidFill>
                       <a:prstDash val="solid"/>
                       <a:round/>
@@ -1854,7 +1731,7 @@
                     </a:lnT>
                     <a:lnB w="6350" cap="flat" cmpd="sng" algn="ctr">
                       <a:solidFill>
-                        <a:srgbClr val="B5B5B5"/>
+                        <a:srgbClr val="C6C9CD"/>
                       </a:solidFill>
                       <a:prstDash val="solid"/>
                       <a:round/>
@@ -1873,11 +1750,11 @@
                     </a:bodyPr>
                     <a:lstStyle/>
                     <a:p>
-                      <a:pPr algn="l" indent="0" marL="0">
+                      <a:pPr algn="ctr" indent="0" marL="0">
                         <a:buNone/>
                       </a:pPr>
                       <a:r>
-                        <a:rPr lang="en-US" sz="1200" dirty="0">
+                        <a:rPr lang="en-US" sz="950" dirty="0">
                           <a:solidFill>
                             <a:srgbClr val="000000"/>
                           </a:solidFill>
@@ -1887,17 +1764,17 @@
                         </a:rPr>
                         <a:t>Corpus request</a:t>
                       </a:r>
-                      <a:endParaRPr lang="en-US" sz="1200" dirty="0">
+                      <a:endParaRPr lang="en-US" sz="950" dirty="0">
                         <a:latin typeface="Arial" charset="0"/>
                         <a:ea typeface="Arial" charset="0"/>
                         <a:cs typeface="Arial" charset="0"/>
                       </a:endParaRPr>
                     </a:p>
                   </a:txBody>
-                  <a:tcPr marL="101600" marR="101600" marT="25400" marB="25400" anchor="ctr">
+                  <a:tcPr marL="101600" marR="101600" marT="38100" marB="38100" anchor="ctr">
                     <a:lnL w="6350" cap="flat" cmpd="sng" algn="ctr">
                       <a:solidFill>
-                        <a:srgbClr val="B5B5B5"/>
+                        <a:srgbClr val="C6C9CD"/>
                       </a:solidFill>
                       <a:prstDash val="solid"/>
                       <a:round/>
@@ -1906,7 +1783,7 @@
                     </a:lnL>
                     <a:lnR w="6350" cap="flat" cmpd="sng" algn="ctr">
                       <a:solidFill>
-                        <a:srgbClr val="B5B5B5"/>
+                        <a:srgbClr val="C6C9CD"/>
                       </a:solidFill>
                       <a:prstDash val="solid"/>
                       <a:round/>
@@ -1915,7 +1792,7 @@
                     </a:lnR>
                     <a:lnT w="6350" cap="flat" cmpd="sng" algn="ctr">
                       <a:solidFill>
-                        <a:srgbClr val="B5B5B5"/>
+                        <a:srgbClr val="C6C9CD"/>
                       </a:solidFill>
                       <a:prstDash val="solid"/>
                       <a:round/>
@@ -1924,7 +1801,7 @@
                     </a:lnT>
                     <a:lnB w="6350" cap="flat" cmpd="sng" algn="ctr">
                       <a:solidFill>
-                        <a:srgbClr val="B5B5B5"/>
+                        <a:srgbClr val="C6C9CD"/>
                       </a:solidFill>
                       <a:prstDash val="solid"/>
                       <a:round/>
@@ -1943,11 +1820,11 @@
                     </a:bodyPr>
                     <a:lstStyle/>
                     <a:p>
-                      <a:pPr algn="l" indent="0" marL="0">
+                      <a:pPr algn="ctr" indent="0" marL="0">
                         <a:buNone/>
                       </a:pPr>
                       <a:r>
-                        <a:rPr lang="en-US" sz="1200" dirty="0">
+                        <a:rPr lang="en-US" sz="950" dirty="0">
                           <a:solidFill>
                             <a:srgbClr val="000000"/>
                           </a:solidFill>
@@ -1957,17 +1834,17 @@
                         </a:rPr>
                         <a:t>Source pack + task brief</a:t>
                       </a:r>
-                      <a:endParaRPr lang="en-US" sz="1200" dirty="0">
+                      <a:endParaRPr lang="en-US" sz="950" dirty="0">
                         <a:latin typeface="Arial" charset="0"/>
                         <a:ea typeface="Arial" charset="0"/>
                         <a:cs typeface="Arial" charset="0"/>
                       </a:endParaRPr>
                     </a:p>
                   </a:txBody>
-                  <a:tcPr marL="101600" marR="101600" marT="25400" marB="25400" anchor="ctr">
+                  <a:tcPr marL="101600" marR="101600" marT="38100" marB="38100" anchor="ctr">
                     <a:lnL w="6350" cap="flat" cmpd="sng" algn="ctr">
                       <a:solidFill>
-                        <a:srgbClr val="B5B5B5"/>
+                        <a:srgbClr val="C6C9CD"/>
                       </a:solidFill>
                       <a:prstDash val="solid"/>
                       <a:round/>
@@ -1976,7 +1853,7 @@
                     </a:lnL>
                     <a:lnR w="6350" cap="flat" cmpd="sng" algn="ctr">
                       <a:solidFill>
-                        <a:srgbClr val="B5B5B5"/>
+                        <a:srgbClr val="C6C9CD"/>
                       </a:solidFill>
                       <a:prstDash val="solid"/>
                       <a:round/>
@@ -1985,7 +1862,7 @@
                     </a:lnR>
                     <a:lnT w="6350" cap="flat" cmpd="sng" algn="ctr">
                       <a:solidFill>
-                        <a:srgbClr val="B5B5B5"/>
+                        <a:srgbClr val="C6C9CD"/>
                       </a:solidFill>
                       <a:prstDash val="solid"/>
                       <a:round/>
@@ -1994,7 +1871,7 @@
                     </a:lnT>
                     <a:lnB w="6350" cap="flat" cmpd="sng" algn="ctr">
                       <a:solidFill>
-                        <a:srgbClr val="B5B5B5"/>
+                        <a:srgbClr val="C6C9CD"/>
                       </a:solidFill>
                       <a:prstDash val="solid"/>
                       <a:round/>
@@ -2013,11 +1890,11 @@
                     </a:bodyPr>
                     <a:lstStyle/>
                     <a:p>
-                      <a:pPr algn="l" indent="0" marL="0">
+                      <a:pPr algn="ctr" indent="0" marL="0">
                         <a:buNone/>
                       </a:pPr>
                       <a:r>
-                        <a:rPr lang="en-US" sz="1200" dirty="0">
+                        <a:rPr lang="en-US" sz="950" dirty="0">
                           <a:solidFill>
                             <a:srgbClr val="000000"/>
                           </a:solidFill>
@@ -2027,17 +1904,17 @@
                         </a:rPr>
                         <a:t>Draft + evidence trail</a:t>
                       </a:r>
-                      <a:endParaRPr lang="en-US" sz="1200" dirty="0">
+                      <a:endParaRPr lang="en-US" sz="950" dirty="0">
                         <a:latin typeface="Arial" charset="0"/>
                         <a:ea typeface="Arial" charset="0"/>
                         <a:cs typeface="Arial" charset="0"/>
                       </a:endParaRPr>
                     </a:p>
                   </a:txBody>
-                  <a:tcPr marL="101600" marR="101600" marT="25400" marB="25400" anchor="ctr">
+                  <a:tcPr marL="101600" marR="101600" marT="38100" marB="38100" anchor="ctr">
                     <a:lnL w="6350" cap="flat" cmpd="sng" algn="ctr">
                       <a:solidFill>
-                        <a:srgbClr val="B5B5B5"/>
+                        <a:srgbClr val="C6C9CD"/>
                       </a:solidFill>
                       <a:prstDash val="solid"/>
                       <a:round/>
@@ -2046,7 +1923,7 @@
                     </a:lnL>
                     <a:lnR w="6350" cap="flat" cmpd="sng" algn="ctr">
                       <a:solidFill>
-                        <a:srgbClr val="B5B5B5"/>
+                        <a:srgbClr val="C6C9CD"/>
                       </a:solidFill>
                       <a:prstDash val="solid"/>
                       <a:round/>
@@ -2055,7 +1932,7 @@
                     </a:lnR>
                     <a:lnT w="6350" cap="flat" cmpd="sng" algn="ctr">
                       <a:solidFill>
-                        <a:srgbClr val="B5B5B5"/>
+                        <a:srgbClr val="C6C9CD"/>
                       </a:solidFill>
                       <a:prstDash val="solid"/>
                       <a:round/>
@@ -2064,7 +1941,7 @@
                     </a:lnT>
                     <a:lnB w="6350" cap="flat" cmpd="sng" algn="ctr">
                       <a:solidFill>
-                        <a:srgbClr val="B5B5B5"/>
+                        <a:srgbClr val="C6C9CD"/>
                       </a:solidFill>
                       <a:prstDash val="solid"/>
                       <a:round/>
@@ -2083,11 +1960,11 @@
                     </a:bodyPr>
                     <a:lstStyle/>
                     <a:p>
-                      <a:pPr algn="l" indent="0" marL="0">
+                      <a:pPr algn="ctr" indent="0" marL="0">
                         <a:buNone/>
                       </a:pPr>
                       <a:r>
-                        <a:rPr lang="en-US" sz="1200" dirty="0">
+                        <a:rPr lang="en-US" sz="950" dirty="0">
                           <a:solidFill>
                             <a:srgbClr val="000000"/>
                           </a:solidFill>
@@ -2097,17 +1974,17 @@
                         </a:rPr>
                         <a:t>Signed draft + resolved defects</a:t>
                       </a:r>
-                      <a:endParaRPr lang="en-US" sz="1200" dirty="0">
+                      <a:endParaRPr lang="en-US" sz="950" dirty="0">
                         <a:latin typeface="Arial" charset="0"/>
                         <a:ea typeface="Arial" charset="0"/>
                         <a:cs typeface="Arial" charset="0"/>
                       </a:endParaRPr>
                     </a:p>
                   </a:txBody>
-                  <a:tcPr marL="101600" marR="101600" marT="25400" marB="25400" anchor="ctr">
+                  <a:tcPr marL="101600" marR="101600" marT="38100" marB="38100" anchor="ctr">
                     <a:lnL w="6350" cap="flat" cmpd="sng" algn="ctr">
                       <a:solidFill>
-                        <a:srgbClr val="B5B5B5"/>
+                        <a:srgbClr val="C6C9CD"/>
                       </a:solidFill>
                       <a:prstDash val="solid"/>
                       <a:round/>
@@ -2116,7 +1993,7 @@
                     </a:lnL>
                     <a:lnR w="6350" cap="flat" cmpd="sng" algn="ctr">
                       <a:solidFill>
-                        <a:srgbClr val="B5B5B5"/>
+                        <a:srgbClr val="C6C9CD"/>
                       </a:solidFill>
                       <a:prstDash val="solid"/>
                       <a:round/>
@@ -2125,7 +2002,7 @@
                     </a:lnR>
                     <a:lnT w="6350" cap="flat" cmpd="sng" algn="ctr">
                       <a:solidFill>
-                        <a:srgbClr val="B5B5B5"/>
+                        <a:srgbClr val="C6C9CD"/>
                       </a:solidFill>
                       <a:prstDash val="solid"/>
                       <a:round/>
@@ -2134,7 +2011,7 @@
                     </a:lnT>
                     <a:lnB w="6350" cap="flat" cmpd="sng" algn="ctr">
                       <a:solidFill>
-                        <a:srgbClr val="B5B5B5"/>
+                        <a:srgbClr val="C6C9CD"/>
                       </a:solidFill>
                       <a:prstDash val="solid"/>
                       <a:round/>
@@ -2147,7 +2024,7 @@
                   </a:tcPr>
                 </a:tc>
               </a:tr>
-              <a:tr h="406400">
+              <a:tr h="368300">
                 <a:tc>
                   <a:txBody>
                     <a:bodyPr>
@@ -2159,7 +2036,7 @@
                         <a:buNone/>
                       </a:pPr>
                       <a:r>
-                        <a:rPr lang="en-US" sz="1200" b="1" dirty="0">
+                        <a:rPr lang="en-US" sz="950" b="1" dirty="0">
                           <a:solidFill>
                             <a:srgbClr val="000000"/>
                           </a:solidFill>
@@ -2169,17 +2046,17 @@
                         </a:rPr>
                         <a:t>OUTPUT</a:t>
                       </a:r>
-                      <a:endParaRPr lang="en-US" sz="1200" dirty="0">
+                      <a:endParaRPr lang="en-US" sz="950" dirty="0">
                         <a:latin typeface="Arial" charset="0"/>
                         <a:ea typeface="Arial" charset="0"/>
                         <a:cs typeface="Arial" charset="0"/>
                       </a:endParaRPr>
                     </a:p>
                   </a:txBody>
-                  <a:tcPr marL="101600" marR="101600" marT="25400" marB="25400" anchor="ctr">
+                  <a:tcPr marL="101600" marR="101600" marT="38100" marB="38100" anchor="ctr">
                     <a:lnL w="6350" cap="flat" cmpd="sng" algn="ctr">
                       <a:solidFill>
-                        <a:srgbClr val="B5B5B5"/>
+                        <a:srgbClr val="C6C9CD"/>
                       </a:solidFill>
                       <a:prstDash val="solid"/>
                       <a:round/>
@@ -2188,7 +2065,7 @@
                     </a:lnL>
                     <a:lnR w="6350" cap="flat" cmpd="sng" algn="ctr">
                       <a:solidFill>
-                        <a:srgbClr val="B5B5B5"/>
+                        <a:srgbClr val="C6C9CD"/>
                       </a:solidFill>
                       <a:prstDash val="solid"/>
                       <a:round/>
@@ -2197,7 +2074,7 @@
                     </a:lnR>
                     <a:lnT w="6350" cap="flat" cmpd="sng" algn="ctr">
                       <a:solidFill>
-                        <a:srgbClr val="B5B5B5"/>
+                        <a:srgbClr val="C6C9CD"/>
                       </a:solidFill>
                       <a:prstDash val="solid"/>
                       <a:round/>
@@ -2206,7 +2083,7 @@
                     </a:lnT>
                     <a:lnB w="6350" cap="flat" cmpd="sng" algn="ctr">
                       <a:solidFill>
-                        <a:srgbClr val="B5B5B5"/>
+                        <a:srgbClr val="C6C9CD"/>
                       </a:solidFill>
                       <a:prstDash val="solid"/>
                       <a:round/>
@@ -2225,11 +2102,11 @@
                     </a:bodyPr>
                     <a:lstStyle/>
                     <a:p>
-                      <a:pPr algn="l" indent="0" marL="0">
+                      <a:pPr algn="ctr" indent="0" marL="0">
                         <a:buNone/>
                       </a:pPr>
                       <a:r>
-                        <a:rPr lang="en-US" sz="1200" dirty="0">
+                        <a:rPr lang="en-US" sz="950" dirty="0">
                           <a:solidFill>
                             <a:srgbClr val="000000"/>
                           </a:solidFill>
@@ -2239,17 +2116,17 @@
                         </a:rPr>
                         <a:t>Versioned source pack</a:t>
                       </a:r>
-                      <a:endParaRPr lang="en-US" sz="1200" dirty="0">
+                      <a:endParaRPr lang="en-US" sz="950" dirty="0">
                         <a:latin typeface="Arial" charset="0"/>
                         <a:ea typeface="Arial" charset="0"/>
                         <a:cs typeface="Arial" charset="0"/>
                       </a:endParaRPr>
                     </a:p>
                   </a:txBody>
-                  <a:tcPr marL="101600" marR="101600" marT="25400" marB="25400" anchor="ctr">
+                  <a:tcPr marL="101600" marR="101600" marT="38100" marB="38100" anchor="ctr">
                     <a:lnL w="6350" cap="flat" cmpd="sng" algn="ctr">
                       <a:solidFill>
-                        <a:srgbClr val="B5B5B5"/>
+                        <a:srgbClr val="C6C9CD"/>
                       </a:solidFill>
                       <a:prstDash val="solid"/>
                       <a:round/>
@@ -2258,7 +2135,7 @@
                     </a:lnL>
                     <a:lnR w="6350" cap="flat" cmpd="sng" algn="ctr">
                       <a:solidFill>
-                        <a:srgbClr val="B5B5B5"/>
+                        <a:srgbClr val="C6C9CD"/>
                       </a:solidFill>
                       <a:prstDash val="solid"/>
                       <a:round/>
@@ -2267,7 +2144,7 @@
                     </a:lnR>
                     <a:lnT w="6350" cap="flat" cmpd="sng" algn="ctr">
                       <a:solidFill>
-                        <a:srgbClr val="B5B5B5"/>
+                        <a:srgbClr val="C6C9CD"/>
                       </a:solidFill>
                       <a:prstDash val="solid"/>
                       <a:round/>
@@ -2276,7 +2153,7 @@
                     </a:lnT>
                     <a:lnB w="6350" cap="flat" cmpd="sng" algn="ctr">
                       <a:solidFill>
-                        <a:srgbClr val="B5B5B5"/>
+                        <a:srgbClr val="C6C9CD"/>
                       </a:solidFill>
                       <a:prstDash val="solid"/>
                       <a:round/>
@@ -2295,11 +2172,11 @@
                     </a:bodyPr>
                     <a:lstStyle/>
                     <a:p>
-                      <a:pPr algn="l" indent="0" marL="0">
+                      <a:pPr algn="ctr" indent="0" marL="0">
                         <a:buNone/>
                       </a:pPr>
                       <a:r>
-                        <a:rPr lang="en-US" sz="1200" dirty="0">
+                        <a:rPr lang="en-US" sz="950" dirty="0">
                           <a:solidFill>
                             <a:srgbClr val="000000"/>
                           </a:solidFill>
@@ -2309,17 +2186,17 @@
                         </a:rPr>
                         <a:t>Cited draft + uncertainty flags</a:t>
                       </a:r>
-                      <a:endParaRPr lang="en-US" sz="1200" dirty="0">
+                      <a:endParaRPr lang="en-US" sz="950" dirty="0">
                         <a:latin typeface="Arial" charset="0"/>
                         <a:ea typeface="Arial" charset="0"/>
                         <a:cs typeface="Arial" charset="0"/>
                       </a:endParaRPr>
                     </a:p>
                   </a:txBody>
-                  <a:tcPr marL="101600" marR="101600" marT="25400" marB="25400" anchor="ctr">
+                  <a:tcPr marL="101600" marR="101600" marT="38100" marB="38100" anchor="ctr">
                     <a:lnL w="6350" cap="flat" cmpd="sng" algn="ctr">
                       <a:solidFill>
-                        <a:srgbClr val="B5B5B5"/>
+                        <a:srgbClr val="C6C9CD"/>
                       </a:solidFill>
                       <a:prstDash val="solid"/>
                       <a:round/>
@@ -2328,7 +2205,7 @@
                     </a:lnL>
                     <a:lnR w="6350" cap="flat" cmpd="sng" algn="ctr">
                       <a:solidFill>
-                        <a:srgbClr val="B5B5B5"/>
+                        <a:srgbClr val="C6C9CD"/>
                       </a:solidFill>
                       <a:prstDash val="solid"/>
                       <a:round/>
@@ -2337,7 +2214,7 @@
                     </a:lnR>
                     <a:lnT w="6350" cap="flat" cmpd="sng" algn="ctr">
                       <a:solidFill>
-                        <a:srgbClr val="B5B5B5"/>
+                        <a:srgbClr val="C6C9CD"/>
                       </a:solidFill>
                       <a:prstDash val="solid"/>
                       <a:round/>
@@ -2346,7 +2223,7 @@
                     </a:lnT>
                     <a:lnB w="6350" cap="flat" cmpd="sng" algn="ctr">
                       <a:solidFill>
-                        <a:srgbClr val="B5B5B5"/>
+                        <a:srgbClr val="C6C9CD"/>
                       </a:solidFill>
                       <a:prstDash val="solid"/>
                       <a:round/>
@@ -2365,11 +2242,11 @@
                     </a:bodyPr>
                     <a:lstStyle/>
                     <a:p>
-                      <a:pPr algn="l" indent="0" marL="0">
+                      <a:pPr algn="ctr" indent="0" marL="0">
                         <a:buNone/>
                       </a:pPr>
                       <a:r>
-                        <a:rPr lang="en-US" sz="1200" dirty="0">
+                        <a:rPr lang="en-US" sz="950" dirty="0">
                           <a:solidFill>
                             <a:srgbClr val="000000"/>
                           </a:solidFill>
@@ -2379,17 +2256,17 @@
                         </a:rPr>
                         <a:t>Signed review or defect log</a:t>
                       </a:r>
-                      <a:endParaRPr lang="en-US" sz="1200" dirty="0">
+                      <a:endParaRPr lang="en-US" sz="950" dirty="0">
                         <a:latin typeface="Arial" charset="0"/>
                         <a:ea typeface="Arial" charset="0"/>
                         <a:cs typeface="Arial" charset="0"/>
                       </a:endParaRPr>
                     </a:p>
                   </a:txBody>
-                  <a:tcPr marL="101600" marR="101600" marT="25400" marB="25400" anchor="ctr">
+                  <a:tcPr marL="101600" marR="101600" marT="38100" marB="38100" anchor="ctr">
                     <a:lnL w="6350" cap="flat" cmpd="sng" algn="ctr">
                       <a:solidFill>
-                        <a:srgbClr val="B5B5B5"/>
+                        <a:srgbClr val="C6C9CD"/>
                       </a:solidFill>
                       <a:prstDash val="solid"/>
                       <a:round/>
@@ -2398,7 +2275,7 @@
                     </a:lnL>
                     <a:lnR w="6350" cap="flat" cmpd="sng" algn="ctr">
                       <a:solidFill>
-                        <a:srgbClr val="B5B5B5"/>
+                        <a:srgbClr val="C6C9CD"/>
                       </a:solidFill>
                       <a:prstDash val="solid"/>
                       <a:round/>
@@ -2407,7 +2284,7 @@
                     </a:lnR>
                     <a:lnT w="6350" cap="flat" cmpd="sng" algn="ctr">
                       <a:solidFill>
-                        <a:srgbClr val="B5B5B5"/>
+                        <a:srgbClr val="C6C9CD"/>
                       </a:solidFill>
                       <a:prstDash val="solid"/>
                       <a:round/>
@@ -2416,7 +2293,7 @@
                     </a:lnT>
                     <a:lnB w="6350" cap="flat" cmpd="sng" algn="ctr">
                       <a:solidFill>
-                        <a:srgbClr val="B5B5B5"/>
+                        <a:srgbClr val="C6C9CD"/>
                       </a:solidFill>
                       <a:prstDash val="solid"/>
                       <a:round/>
@@ -2435,11 +2312,11 @@
                     </a:bodyPr>
                     <a:lstStyle/>
                     <a:p>
-                      <a:pPr algn="l" indent="0" marL="0">
+                      <a:pPr algn="ctr" indent="0" marL="0">
                         <a:buNone/>
                       </a:pPr>
                       <a:r>
-                        <a:rPr lang="en-US" sz="1200" dirty="0">
+                        <a:rPr lang="en-US" sz="950" dirty="0">
                           <a:solidFill>
                             <a:srgbClr val="000000"/>
                           </a:solidFill>
@@ -2449,17 +2326,17 @@
                         </a:rPr>
                         <a:t>Authorized client deliverable</a:t>
                       </a:r>
-                      <a:endParaRPr lang="en-US" sz="1200" dirty="0">
+                      <a:endParaRPr lang="en-US" sz="950" dirty="0">
                         <a:latin typeface="Arial" charset="0"/>
                         <a:ea typeface="Arial" charset="0"/>
                         <a:cs typeface="Arial" charset="0"/>
                       </a:endParaRPr>
                     </a:p>
                   </a:txBody>
-                  <a:tcPr marL="101600" marR="101600" marT="25400" marB="25400" anchor="ctr">
+                  <a:tcPr marL="101600" marR="101600" marT="38100" marB="38100" anchor="ctr">
                     <a:lnL w="6350" cap="flat" cmpd="sng" algn="ctr">
                       <a:solidFill>
-                        <a:srgbClr val="B5B5B5"/>
+                        <a:srgbClr val="C6C9CD"/>
                       </a:solidFill>
                       <a:prstDash val="solid"/>
                       <a:round/>
@@ -2468,7 +2345,7 @@
                     </a:lnL>
                     <a:lnR w="6350" cap="flat" cmpd="sng" algn="ctr">
                       <a:solidFill>
-                        <a:srgbClr val="B5B5B5"/>
+                        <a:srgbClr val="C6C9CD"/>
                       </a:solidFill>
                       <a:prstDash val="solid"/>
                       <a:round/>
@@ -2477,7 +2354,7 @@
                     </a:lnR>
                     <a:lnT w="6350" cap="flat" cmpd="sng" algn="ctr">
                       <a:solidFill>
-                        <a:srgbClr val="B5B5B5"/>
+                        <a:srgbClr val="C6C9CD"/>
                       </a:solidFill>
                       <a:prstDash val="solid"/>
                       <a:round/>
@@ -2486,7 +2363,7 @@
                     </a:lnT>
                     <a:lnB w="6350" cap="flat" cmpd="sng" algn="ctr">
                       <a:solidFill>
-                        <a:srgbClr val="B5B5B5"/>
+                        <a:srgbClr val="C6C9CD"/>
                       </a:solidFill>
                       <a:prstDash val="solid"/>
                       <a:round/>
@@ -2499,7 +2376,7 @@
                   </a:tcPr>
                 </a:tc>
               </a:tr>
-              <a:tr h="406400">
+              <a:tr h="368300">
                 <a:tc>
                   <a:txBody>
                     <a:bodyPr>
@@ -2511,7 +2388,7 @@
                         <a:buNone/>
                       </a:pPr>
                       <a:r>
-                        <a:rPr lang="en-US" sz="1200" b="1" dirty="0">
+                        <a:rPr lang="en-US" sz="950" b="1" dirty="0">
                           <a:solidFill>
                             <a:srgbClr val="000000"/>
                           </a:solidFill>
@@ -2521,17 +2398,17 @@
                         </a:rPr>
                         <a:t>OWNER</a:t>
                       </a:r>
-                      <a:endParaRPr lang="en-US" sz="1200" dirty="0">
+                      <a:endParaRPr lang="en-US" sz="950" dirty="0">
                         <a:latin typeface="Arial" charset="0"/>
                         <a:ea typeface="Arial" charset="0"/>
                         <a:cs typeface="Arial" charset="0"/>
                       </a:endParaRPr>
                     </a:p>
                   </a:txBody>
-                  <a:tcPr marL="101600" marR="101600" marT="25400" marB="25400" anchor="ctr">
+                  <a:tcPr marL="101600" marR="101600" marT="38100" marB="38100" anchor="ctr">
                     <a:lnL w="6350" cap="flat" cmpd="sng" algn="ctr">
                       <a:solidFill>
-                        <a:srgbClr val="B5B5B5"/>
+                        <a:srgbClr val="C6C9CD"/>
                       </a:solidFill>
                       <a:prstDash val="solid"/>
                       <a:round/>
@@ -2540,7 +2417,7 @@
                     </a:lnL>
                     <a:lnR w="6350" cap="flat" cmpd="sng" algn="ctr">
                       <a:solidFill>
-                        <a:srgbClr val="B5B5B5"/>
+                        <a:srgbClr val="C6C9CD"/>
                       </a:solidFill>
                       <a:prstDash val="solid"/>
                       <a:round/>
@@ -2549,7 +2426,7 @@
                     </a:lnR>
                     <a:lnT w="6350" cap="flat" cmpd="sng" algn="ctr">
                       <a:solidFill>
-                        <a:srgbClr val="B5B5B5"/>
+                        <a:srgbClr val="C6C9CD"/>
                       </a:solidFill>
                       <a:prstDash val="solid"/>
                       <a:round/>
@@ -2558,7 +2435,7 @@
                     </a:lnT>
                     <a:lnB w="6350" cap="flat" cmpd="sng" algn="ctr">
                       <a:solidFill>
-                        <a:srgbClr val="B5B5B5"/>
+                        <a:srgbClr val="C6C9CD"/>
                       </a:solidFill>
                       <a:prstDash val="solid"/>
                       <a:round/>
@@ -2577,11 +2454,11 @@
                     </a:bodyPr>
                     <a:lstStyle/>
                     <a:p>
-                      <a:pPr algn="l" indent="0" marL="0">
+                      <a:pPr algn="ctr" indent="0" marL="0">
                         <a:buNone/>
                       </a:pPr>
                       <a:r>
-                        <a:rPr lang="en-US" sz="1200" dirty="0">
+                        <a:rPr lang="en-US" sz="950" dirty="0">
                           <a:solidFill>
                             <a:srgbClr val="000000"/>
                           </a:solidFill>
@@ -2591,17 +2468,17 @@
                         </a:rPr>
                         <a:t>Source steward</a:t>
                       </a:r>
-                      <a:endParaRPr lang="en-US" sz="1200" dirty="0">
+                      <a:endParaRPr lang="en-US" sz="950" dirty="0">
                         <a:latin typeface="Arial" charset="0"/>
                         <a:ea typeface="Arial" charset="0"/>
                         <a:cs typeface="Arial" charset="0"/>
                       </a:endParaRPr>
                     </a:p>
                   </a:txBody>
-                  <a:tcPr marL="101600" marR="101600" marT="25400" marB="25400" anchor="ctr">
+                  <a:tcPr marL="101600" marR="101600" marT="38100" marB="38100" anchor="ctr">
                     <a:lnL w="6350" cap="flat" cmpd="sng" algn="ctr">
                       <a:solidFill>
-                        <a:srgbClr val="B5B5B5"/>
+                        <a:srgbClr val="C6C9CD"/>
                       </a:solidFill>
                       <a:prstDash val="solid"/>
                       <a:round/>
@@ -2610,7 +2487,7 @@
                     </a:lnL>
                     <a:lnR w="6350" cap="flat" cmpd="sng" algn="ctr">
                       <a:solidFill>
-                        <a:srgbClr val="B5B5B5"/>
+                        <a:srgbClr val="C6C9CD"/>
                       </a:solidFill>
                       <a:prstDash val="solid"/>
                       <a:round/>
@@ -2619,7 +2496,7 @@
                     </a:lnR>
                     <a:lnT w="6350" cap="flat" cmpd="sng" algn="ctr">
                       <a:solidFill>
-                        <a:srgbClr val="B5B5B5"/>
+                        <a:srgbClr val="C6C9CD"/>
                       </a:solidFill>
                       <a:prstDash val="solid"/>
                       <a:round/>
@@ -2628,7 +2505,7 @@
                     </a:lnT>
                     <a:lnB w="6350" cap="flat" cmpd="sng" algn="ctr">
                       <a:solidFill>
-                        <a:srgbClr val="B5B5B5"/>
+                        <a:srgbClr val="C6C9CD"/>
                       </a:solidFill>
                       <a:prstDash val="solid"/>
                       <a:round/>
@@ -2647,11 +2524,11 @@
                     </a:bodyPr>
                     <a:lstStyle/>
                     <a:p>
-                      <a:pPr algn="l" indent="0" marL="0">
+                      <a:pPr algn="ctr" indent="0" marL="0">
                         <a:buNone/>
                       </a:pPr>
                       <a:r>
-                        <a:rPr lang="en-US" sz="1200" dirty="0">
+                        <a:rPr lang="en-US" sz="950" dirty="0">
                           <a:solidFill>
                             <a:srgbClr val="000000"/>
                           </a:solidFill>
@@ -2661,17 +2538,17 @@
                         </a:rPr>
                         <a:t>Engagement team</a:t>
                       </a:r>
-                      <a:endParaRPr lang="en-US" sz="1200" dirty="0">
+                      <a:endParaRPr lang="en-US" sz="950" dirty="0">
                         <a:latin typeface="Arial" charset="0"/>
                         <a:ea typeface="Arial" charset="0"/>
                         <a:cs typeface="Arial" charset="0"/>
                       </a:endParaRPr>
                     </a:p>
                   </a:txBody>
-                  <a:tcPr marL="101600" marR="101600" marT="25400" marB="25400" anchor="ctr">
+                  <a:tcPr marL="101600" marR="101600" marT="38100" marB="38100" anchor="ctr">
                     <a:lnL w="6350" cap="flat" cmpd="sng" algn="ctr">
                       <a:solidFill>
-                        <a:srgbClr val="B5B5B5"/>
+                        <a:srgbClr val="C6C9CD"/>
                       </a:solidFill>
                       <a:prstDash val="solid"/>
                       <a:round/>
@@ -2680,7 +2557,7 @@
                     </a:lnL>
                     <a:lnR w="6350" cap="flat" cmpd="sng" algn="ctr">
                       <a:solidFill>
-                        <a:srgbClr val="B5B5B5"/>
+                        <a:srgbClr val="C6C9CD"/>
                       </a:solidFill>
                       <a:prstDash val="solid"/>
                       <a:round/>
@@ -2689,7 +2566,7 @@
                     </a:lnR>
                     <a:lnT w="6350" cap="flat" cmpd="sng" algn="ctr">
                       <a:solidFill>
-                        <a:srgbClr val="B5B5B5"/>
+                        <a:srgbClr val="C6C9CD"/>
                       </a:solidFill>
                       <a:prstDash val="solid"/>
                       <a:round/>
@@ -2698,7 +2575,7 @@
                     </a:lnT>
                     <a:lnB w="6350" cap="flat" cmpd="sng" algn="ctr">
                       <a:solidFill>
-                        <a:srgbClr val="B5B5B5"/>
+                        <a:srgbClr val="C6C9CD"/>
                       </a:solidFill>
                       <a:prstDash val="solid"/>
                       <a:round/>
@@ -2717,11 +2594,11 @@
                     </a:bodyPr>
                     <a:lstStyle/>
                     <a:p>
-                      <a:pPr algn="l" indent="0" marL="0">
+                      <a:pPr algn="ctr" indent="0" marL="0">
                         <a:buNone/>
                       </a:pPr>
                       <a:r>
-                        <a:rPr lang="en-US" sz="1200" dirty="0">
+                        <a:rPr lang="en-US" sz="950" dirty="0">
                           <a:solidFill>
                             <a:srgbClr val="000000"/>
                           </a:solidFill>
@@ -2731,17 +2608,17 @@
                         </a:rPr>
                         <a:t>Expert reviewer</a:t>
                       </a:r>
-                      <a:endParaRPr lang="en-US" sz="1200" dirty="0">
+                      <a:endParaRPr lang="en-US" sz="950" dirty="0">
                         <a:latin typeface="Arial" charset="0"/>
                         <a:ea typeface="Arial" charset="0"/>
                         <a:cs typeface="Arial" charset="0"/>
                       </a:endParaRPr>
                     </a:p>
                   </a:txBody>
-                  <a:tcPr marL="101600" marR="101600" marT="25400" marB="25400" anchor="ctr">
+                  <a:tcPr marL="101600" marR="101600" marT="38100" marB="38100" anchor="ctr">
                     <a:lnL w="6350" cap="flat" cmpd="sng" algn="ctr">
                       <a:solidFill>
-                        <a:srgbClr val="B5B5B5"/>
+                        <a:srgbClr val="C6C9CD"/>
                       </a:solidFill>
                       <a:prstDash val="solid"/>
                       <a:round/>
@@ -2750,7 +2627,7 @@
                     </a:lnL>
                     <a:lnR w="6350" cap="flat" cmpd="sng" algn="ctr">
                       <a:solidFill>
-                        <a:srgbClr val="B5B5B5"/>
+                        <a:srgbClr val="C6C9CD"/>
                       </a:solidFill>
                       <a:prstDash val="solid"/>
                       <a:round/>
@@ -2759,7 +2636,7 @@
                     </a:lnR>
                     <a:lnT w="6350" cap="flat" cmpd="sng" algn="ctr">
                       <a:solidFill>
-                        <a:srgbClr val="B5B5B5"/>
+                        <a:srgbClr val="C6C9CD"/>
                       </a:solidFill>
                       <a:prstDash val="solid"/>
                       <a:round/>
@@ -2768,7 +2645,7 @@
                     </a:lnT>
                     <a:lnB w="6350" cap="flat" cmpd="sng" algn="ctr">
                       <a:solidFill>
-                        <a:srgbClr val="B5B5B5"/>
+                        <a:srgbClr val="C6C9CD"/>
                       </a:solidFill>
                       <a:prstDash val="solid"/>
                       <a:round/>
@@ -2787,11 +2664,11 @@
                     </a:bodyPr>
                     <a:lstStyle/>
                     <a:p>
-                      <a:pPr algn="l" indent="0" marL="0">
+                      <a:pPr algn="ctr" indent="0" marL="0">
                         <a:buNone/>
                       </a:pPr>
                       <a:r>
-                        <a:rPr lang="en-US" sz="1200" dirty="0">
+                        <a:rPr lang="en-US" sz="950" dirty="0">
                           <a:solidFill>
                             <a:srgbClr val="000000"/>
                           </a:solidFill>
@@ -2801,17 +2678,17 @@
                         </a:rPr>
                         <a:t>Engagement lead</a:t>
                       </a:r>
-                      <a:endParaRPr lang="en-US" sz="1200" dirty="0">
+                      <a:endParaRPr lang="en-US" sz="950" dirty="0">
                         <a:latin typeface="Arial" charset="0"/>
                         <a:ea typeface="Arial" charset="0"/>
                         <a:cs typeface="Arial" charset="0"/>
                       </a:endParaRPr>
                     </a:p>
                   </a:txBody>
-                  <a:tcPr marL="101600" marR="101600" marT="25400" marB="25400" anchor="ctr">
+                  <a:tcPr marL="101600" marR="101600" marT="38100" marB="38100" anchor="ctr">
                     <a:lnL w="6350" cap="flat" cmpd="sng" algn="ctr">
                       <a:solidFill>
-                        <a:srgbClr val="B5B5B5"/>
+                        <a:srgbClr val="C6C9CD"/>
                       </a:solidFill>
                       <a:prstDash val="solid"/>
                       <a:round/>
@@ -2820,7 +2697,7 @@
                     </a:lnL>
                     <a:lnR w="6350" cap="flat" cmpd="sng" algn="ctr">
                       <a:solidFill>
-                        <a:srgbClr val="B5B5B5"/>
+                        <a:srgbClr val="C6C9CD"/>
                       </a:solidFill>
                       <a:prstDash val="solid"/>
                       <a:round/>
@@ -2829,7 +2706,7 @@
                     </a:lnR>
                     <a:lnT w="6350" cap="flat" cmpd="sng" algn="ctr">
                       <a:solidFill>
-                        <a:srgbClr val="B5B5B5"/>
+                        <a:srgbClr val="C6C9CD"/>
                       </a:solidFill>
                       <a:prstDash val="solid"/>
                       <a:round/>
@@ -2838,7 +2715,7 @@
                     </a:lnT>
                     <a:lnB w="6350" cap="flat" cmpd="sng" algn="ctr">
                       <a:solidFill>
-                        <a:srgbClr val="B5B5B5"/>
+                        <a:srgbClr val="C6C9CD"/>
                       </a:solidFill>
                       <a:prstDash val="solid"/>
                       <a:round/>
@@ -2851,7 +2728,7 @@
                   </a:tcPr>
                 </a:tc>
               </a:tr>
-              <a:tr h="539750">
+              <a:tr h="482600">
                 <a:tc>
                   <a:txBody>
                     <a:bodyPr>
@@ -2863,7 +2740,7 @@
                         <a:buNone/>
                       </a:pPr>
                       <a:r>
-                        <a:rPr lang="en-US" sz="1200" b="1" dirty="0">
+                        <a:rPr lang="en-US" sz="950" b="1" dirty="0">
                           <a:solidFill>
                             <a:srgbClr val="000000"/>
                           </a:solidFill>
@@ -2873,17 +2750,17 @@
                         </a:rPr>
                         <a:t>RELEASE CONTROL</a:t>
                       </a:r>
-                      <a:endParaRPr lang="en-US" sz="1200" dirty="0">
+                      <a:endParaRPr lang="en-US" sz="950" dirty="0">
                         <a:latin typeface="Arial" charset="0"/>
                         <a:ea typeface="Arial" charset="0"/>
                         <a:cs typeface="Arial" charset="0"/>
                       </a:endParaRPr>
                     </a:p>
                   </a:txBody>
-                  <a:tcPr marL="101600" marR="101600" marT="25400" marB="25400" anchor="ctr">
+                  <a:tcPr marL="101600" marR="101600" marT="38100" marB="38100" anchor="ctr">
                     <a:lnL w="6350" cap="flat" cmpd="sng" algn="ctr">
                       <a:solidFill>
-                        <a:srgbClr val="B5B5B5"/>
+                        <a:srgbClr val="C6C9CD"/>
                       </a:solidFill>
                       <a:prstDash val="solid"/>
                       <a:round/>
@@ -2892,7 +2769,7 @@
                     </a:lnL>
                     <a:lnR w="6350" cap="flat" cmpd="sng" algn="ctr">
                       <a:solidFill>
-                        <a:srgbClr val="B5B5B5"/>
+                        <a:srgbClr val="C6C9CD"/>
                       </a:solidFill>
                       <a:prstDash val="solid"/>
                       <a:round/>
@@ -2901,7 +2778,7 @@
                     </a:lnR>
                     <a:lnT w="6350" cap="flat" cmpd="sng" algn="ctr">
                       <a:solidFill>
-                        <a:srgbClr val="B5B5B5"/>
+                        <a:srgbClr val="C6C9CD"/>
                       </a:solidFill>
                       <a:prstDash val="solid"/>
                       <a:round/>
@@ -2910,7 +2787,7 @@
                     </a:lnT>
                     <a:lnB w="6350" cap="flat" cmpd="sng" algn="ctr">
                       <a:solidFill>
-                        <a:srgbClr val="B5B5B5"/>
+                        <a:srgbClr val="C6C9CD"/>
                       </a:solidFill>
                       <a:prstDash val="solid"/>
                       <a:round/>
@@ -2929,11 +2806,11 @@
                     </a:bodyPr>
                     <a:lstStyle/>
                     <a:p>
-                      <a:pPr algn="l" indent="0" marL="0">
+                      <a:pPr algn="ctr" indent="0" marL="0">
                         <a:buNone/>
                       </a:pPr>
                       <a:r>
-                        <a:rPr lang="en-US" sz="1200" dirty="0">
+                        <a:rPr lang="en-US" sz="950" dirty="0">
                           <a:solidFill>
                             <a:srgbClr val="000000"/>
                           </a:solidFill>
@@ -2943,18 +2820,18 @@
                         </a:rPr>
                         <a:t>Verify permissions</a:t>
                       </a:r>
-                      <a:endParaRPr lang="en-US" sz="1200" dirty="0">
+                      <a:endParaRPr lang="en-US" sz="950" dirty="0">
                         <a:latin typeface="Arial" charset="0"/>
                         <a:ea typeface="Arial" charset="0"/>
                         <a:cs typeface="Arial" charset="0"/>
                       </a:endParaRPr>
                     </a:p>
                     <a:p>
-                      <a:pPr algn="l" indent="0" marL="0">
+                      <a:pPr algn="ctr" indent="0" marL="0">
                         <a:buNone/>
                       </a:pPr>
                       <a:r>
-                        <a:rPr lang="en-US" sz="1200" dirty="0">
+                        <a:rPr lang="en-US" sz="950" dirty="0">
                           <a:solidFill>
                             <a:srgbClr val="000000"/>
                           </a:solidFill>
@@ -2964,17 +2841,17 @@
                         </a:rPr>
                         <a:t>and dates</a:t>
                       </a:r>
-                      <a:endParaRPr lang="en-US" sz="1200" dirty="0">
+                      <a:endParaRPr lang="en-US" sz="950" dirty="0">
                         <a:latin typeface="Arial" charset="0"/>
                         <a:ea typeface="Arial" charset="0"/>
                         <a:cs typeface="Arial" charset="0"/>
                       </a:endParaRPr>
                     </a:p>
                   </a:txBody>
-                  <a:tcPr marL="101600" marR="101600" marT="25400" marB="25400" anchor="ctr">
+                  <a:tcPr marL="101600" marR="101600" marT="38100" marB="38100" anchor="ctr">
                     <a:lnL w="6350" cap="flat" cmpd="sng" algn="ctr">
                       <a:solidFill>
-                        <a:srgbClr val="B5B5B5"/>
+                        <a:srgbClr val="C6C9CD"/>
                       </a:solidFill>
                       <a:prstDash val="solid"/>
                       <a:round/>
@@ -2983,7 +2860,7 @@
                     </a:lnL>
                     <a:lnR w="6350" cap="flat" cmpd="sng" algn="ctr">
                       <a:solidFill>
-                        <a:srgbClr val="B5B5B5"/>
+                        <a:srgbClr val="C6C9CD"/>
                       </a:solidFill>
                       <a:prstDash val="solid"/>
                       <a:round/>
@@ -2992,7 +2869,7 @@
                     </a:lnR>
                     <a:lnT w="6350" cap="flat" cmpd="sng" algn="ctr">
                       <a:solidFill>
-                        <a:srgbClr val="B5B5B5"/>
+                        <a:srgbClr val="C6C9CD"/>
                       </a:solidFill>
                       <a:prstDash val="solid"/>
                       <a:round/>
@@ -3001,7 +2878,7 @@
                     </a:lnT>
                     <a:lnB w="6350" cap="flat" cmpd="sng" algn="ctr">
                       <a:solidFill>
-                        <a:srgbClr val="B5B5B5"/>
+                        <a:srgbClr val="C6C9CD"/>
                       </a:solidFill>
                       <a:prstDash val="solid"/>
                       <a:round/>
@@ -3020,11 +2897,11 @@
                     </a:bodyPr>
                     <a:lstStyle/>
                     <a:p>
-                      <a:pPr algn="l" indent="0" marL="0">
+                      <a:pPr algn="ctr" indent="0" marL="0">
                         <a:buNone/>
                       </a:pPr>
                       <a:r>
-                        <a:rPr lang="en-US" sz="1200" dirty="0">
+                        <a:rPr lang="en-US" sz="950" dirty="0">
                           <a:solidFill>
                             <a:srgbClr val="000000"/>
                           </a:solidFill>
@@ -3034,18 +2911,18 @@
                         </a:rPr>
                         <a:t>Check citations</a:t>
                       </a:r>
-                      <a:endParaRPr lang="en-US" sz="1200" dirty="0">
+                      <a:endParaRPr lang="en-US" sz="950" dirty="0">
                         <a:latin typeface="Arial" charset="0"/>
                         <a:ea typeface="Arial" charset="0"/>
                         <a:cs typeface="Arial" charset="0"/>
                       </a:endParaRPr>
                     </a:p>
                     <a:p>
-                      <a:pPr algn="l" indent="0" marL="0">
+                      <a:pPr algn="ctr" indent="0" marL="0">
                         <a:buNone/>
                       </a:pPr>
                       <a:r>
-                        <a:rPr lang="en-US" sz="1200" dirty="0">
+                        <a:rPr lang="en-US" sz="950" dirty="0">
                           <a:solidFill>
                             <a:srgbClr val="000000"/>
                           </a:solidFill>
@@ -3055,17 +2932,17 @@
                         </a:rPr>
                         <a:t>and evidence gaps</a:t>
                       </a:r>
-                      <a:endParaRPr lang="en-US" sz="1200" dirty="0">
+                      <a:endParaRPr lang="en-US" sz="950" dirty="0">
                         <a:latin typeface="Arial" charset="0"/>
                         <a:ea typeface="Arial" charset="0"/>
                         <a:cs typeface="Arial" charset="0"/>
                       </a:endParaRPr>
                     </a:p>
                   </a:txBody>
-                  <a:tcPr marL="101600" marR="101600" marT="25400" marB="25400" anchor="ctr">
+                  <a:tcPr marL="101600" marR="101600" marT="38100" marB="38100" anchor="ctr">
                     <a:lnL w="6350" cap="flat" cmpd="sng" algn="ctr">
                       <a:solidFill>
-                        <a:srgbClr val="B5B5B5"/>
+                        <a:srgbClr val="C6C9CD"/>
                       </a:solidFill>
                       <a:prstDash val="solid"/>
                       <a:round/>
@@ -3074,7 +2951,7 @@
                     </a:lnL>
                     <a:lnR w="6350" cap="flat" cmpd="sng" algn="ctr">
                       <a:solidFill>
-                        <a:srgbClr val="B5B5B5"/>
+                        <a:srgbClr val="C6C9CD"/>
                       </a:solidFill>
                       <a:prstDash val="solid"/>
                       <a:round/>
@@ -3083,7 +2960,7 @@
                     </a:lnR>
                     <a:lnT w="6350" cap="flat" cmpd="sng" algn="ctr">
                       <a:solidFill>
-                        <a:srgbClr val="B5B5B5"/>
+                        <a:srgbClr val="C6C9CD"/>
                       </a:solidFill>
                       <a:prstDash val="solid"/>
                       <a:round/>
@@ -3092,7 +2969,7 @@
                     </a:lnT>
                     <a:lnB w="6350" cap="flat" cmpd="sng" algn="ctr">
                       <a:solidFill>
-                        <a:srgbClr val="B5B5B5"/>
+                        <a:srgbClr val="C6C9CD"/>
                       </a:solidFill>
                       <a:prstDash val="solid"/>
                       <a:round/>
@@ -3111,11 +2988,11 @@
                     </a:bodyPr>
                     <a:lstStyle/>
                     <a:p>
-                      <a:pPr algn="l" indent="0" marL="0">
+                      <a:pPr algn="ctr" indent="0" marL="0">
                         <a:buNone/>
                       </a:pPr>
                       <a:r>
-                        <a:rPr lang="en-US" sz="1200" dirty="0">
+                        <a:rPr lang="en-US" sz="950" dirty="0">
                           <a:solidFill>
                             <a:srgbClr val="000000"/>
                           </a:solidFill>
@@ -3125,18 +3002,18 @@
                         </a:rPr>
                         <a:t>Validate claims</a:t>
                       </a:r>
-                      <a:endParaRPr lang="en-US" sz="1200" dirty="0">
+                      <a:endParaRPr lang="en-US" sz="950" dirty="0">
                         <a:latin typeface="Arial" charset="0"/>
                         <a:ea typeface="Arial" charset="0"/>
                         <a:cs typeface="Arial" charset="0"/>
                       </a:endParaRPr>
                     </a:p>
                     <a:p>
-                      <a:pPr algn="l" indent="0" marL="0">
+                      <a:pPr algn="ctr" indent="0" marL="0">
                         <a:buNone/>
                       </a:pPr>
                       <a:r>
-                        <a:rPr lang="en-US" sz="1200" dirty="0">
+                        <a:rPr lang="en-US" sz="950" dirty="0">
                           <a:solidFill>
                             <a:srgbClr val="000000"/>
                           </a:solidFill>
@@ -3146,17 +3023,17 @@
                         </a:rPr>
                         <a:t>and quality</a:t>
                       </a:r>
-                      <a:endParaRPr lang="en-US" sz="1200" dirty="0">
+                      <a:endParaRPr lang="en-US" sz="950" dirty="0">
                         <a:latin typeface="Arial" charset="0"/>
                         <a:ea typeface="Arial" charset="0"/>
                         <a:cs typeface="Arial" charset="0"/>
                       </a:endParaRPr>
                     </a:p>
                   </a:txBody>
-                  <a:tcPr marL="101600" marR="101600" marT="25400" marB="25400" anchor="ctr">
+                  <a:tcPr marL="101600" marR="101600" marT="38100" marB="38100" anchor="ctr">
                     <a:lnL w="6350" cap="flat" cmpd="sng" algn="ctr">
                       <a:solidFill>
-                        <a:srgbClr val="B5B5B5"/>
+                        <a:srgbClr val="C6C9CD"/>
                       </a:solidFill>
                       <a:prstDash val="solid"/>
                       <a:round/>
@@ -3165,7 +3042,7 @@
                     </a:lnL>
                     <a:lnR w="6350" cap="flat" cmpd="sng" algn="ctr">
                       <a:solidFill>
-                        <a:srgbClr val="B5B5B5"/>
+                        <a:srgbClr val="C6C9CD"/>
                       </a:solidFill>
                       <a:prstDash val="solid"/>
                       <a:round/>
@@ -3174,7 +3051,7 @@
                     </a:lnR>
                     <a:lnT w="6350" cap="flat" cmpd="sng" algn="ctr">
                       <a:solidFill>
-                        <a:srgbClr val="B5B5B5"/>
+                        <a:srgbClr val="C6C9CD"/>
                       </a:solidFill>
                       <a:prstDash val="solid"/>
                       <a:round/>
@@ -3183,7 +3060,7 @@
                     </a:lnT>
                     <a:lnB w="6350" cap="flat" cmpd="sng" algn="ctr">
                       <a:solidFill>
-                        <a:srgbClr val="B5B5B5"/>
+                        <a:srgbClr val="C6C9CD"/>
                       </a:solidFill>
                       <a:prstDash val="solid"/>
                       <a:round/>
@@ -3202,11 +3079,11 @@
                     </a:bodyPr>
                     <a:lstStyle/>
                     <a:p>
-                      <a:pPr algn="l" indent="0" marL="0">
+                      <a:pPr algn="ctr" indent="0" marL="0">
                         <a:buNone/>
                       </a:pPr>
                       <a:r>
-                        <a:rPr lang="en-US" sz="1200" dirty="0">
+                        <a:rPr lang="en-US" sz="950" dirty="0">
                           <a:solidFill>
                             <a:srgbClr val="000000"/>
                           </a:solidFill>
@@ -3216,18 +3093,18 @@
                         </a:rPr>
                         <a:t>Confirm release</a:t>
                       </a:r>
-                      <a:endParaRPr lang="en-US" sz="1200" dirty="0">
+                      <a:endParaRPr lang="en-US" sz="950" dirty="0">
                         <a:latin typeface="Arial" charset="0"/>
                         <a:ea typeface="Arial" charset="0"/>
                         <a:cs typeface="Arial" charset="0"/>
                       </a:endParaRPr>
                     </a:p>
                     <a:p>
-                      <a:pPr algn="l" indent="0" marL="0">
+                      <a:pPr algn="ctr" indent="0" marL="0">
                         <a:buNone/>
                       </a:pPr>
                       <a:r>
-                        <a:rPr lang="en-US" sz="1200" dirty="0">
+                        <a:rPr lang="en-US" sz="950" dirty="0">
                           <a:solidFill>
                             <a:srgbClr val="000000"/>
                           </a:solidFill>
@@ -3237,17 +3114,17 @@
                         </a:rPr>
                         <a:t>approval</a:t>
                       </a:r>
-                      <a:endParaRPr lang="en-US" sz="1200" dirty="0">
+                      <a:endParaRPr lang="en-US" sz="950" dirty="0">
                         <a:latin typeface="Arial" charset="0"/>
                         <a:ea typeface="Arial" charset="0"/>
                         <a:cs typeface="Arial" charset="0"/>
                       </a:endParaRPr>
                     </a:p>
                   </a:txBody>
-                  <a:tcPr marL="101600" marR="101600" marT="25400" marB="25400" anchor="ctr">
+                  <a:tcPr marL="101600" marR="101600" marT="38100" marB="38100" anchor="ctr">
                     <a:lnL w="6350" cap="flat" cmpd="sng" algn="ctr">
                       <a:solidFill>
-                        <a:srgbClr val="B5B5B5"/>
+                        <a:srgbClr val="C6C9CD"/>
                       </a:solidFill>
                       <a:prstDash val="solid"/>
                       <a:round/>
@@ -3256,7 +3133,7 @@
                     </a:lnL>
                     <a:lnR w="6350" cap="flat" cmpd="sng" algn="ctr">
                       <a:solidFill>
-                        <a:srgbClr val="B5B5B5"/>
+                        <a:srgbClr val="C6C9CD"/>
                       </a:solidFill>
                       <a:prstDash val="solid"/>
                       <a:round/>
@@ -3265,7 +3142,7 @@
                     </a:lnR>
                     <a:lnT w="6350" cap="flat" cmpd="sng" algn="ctr">
                       <a:solidFill>
-                        <a:srgbClr val="B5B5B5"/>
+                        <a:srgbClr val="C6C9CD"/>
                       </a:solidFill>
                       <a:prstDash val="solid"/>
                       <a:round/>
@@ -3274,7 +3151,7 @@
                     </a:lnT>
                     <a:lnB w="6350" cap="flat" cmpd="sng" algn="ctr">
                       <a:solidFill>
-                        <a:srgbClr val="B5B5B5"/>
+                        <a:srgbClr val="C6C9CD"/>
                       </a:solidFill>
                       <a:prstDash val="solid"/>
                       <a:round/>
@@ -3293,14 +3170,14 @@
       </p:graphicFrame>
       <p:cxnSp>
         <p:nvCxnSpPr>
-          <p:cNvPr id="11" name="SC_CONNECTOR__forward-1__0"/>
+          <p:cNvPr id="6" name="SC_CONNECTOR__forward-1__0"/>
           <p:cNvCxnSpPr/>
           <p:nvPr/>
         </p:nvCxnSpPr>
         <p:spPr>
           <a:xfrm>
-            <a:off x="2184400" y="1952625"/>
-            <a:ext cx="635000" cy="0"/>
+            <a:off x="1892300" y="1949450"/>
+            <a:ext cx="2247900" cy="0"/>
           </a:xfrm>
           <a:prstGeom prst="line">
             <a:avLst/>
@@ -3319,14 +3196,14 @@
       </p:cxnSp>
       <p:cxnSp>
         <p:nvCxnSpPr>
-          <p:cNvPr id="12" name="SC_CONNECTOR__forward-2__0"/>
+          <p:cNvPr id="7" name="SC_CONNECTOR__forward-2__0"/>
           <p:cNvCxnSpPr/>
           <p:nvPr/>
         </p:nvCxnSpPr>
         <p:spPr>
           <a:xfrm>
-            <a:off x="4425950" y="1952625"/>
-            <a:ext cx="615950" cy="0"/>
+            <a:off x="4622800" y="1949450"/>
+            <a:ext cx="2660650" cy="0"/>
           </a:xfrm>
           <a:prstGeom prst="line">
             <a:avLst/>
@@ -3345,14 +3222,14 @@
       </p:cxnSp>
       <p:cxnSp>
         <p:nvCxnSpPr>
-          <p:cNvPr id="13" name="SC_CONNECTOR__forward-3__0"/>
+          <p:cNvPr id="8" name="SC_CONNECTOR__forward-3__0"/>
           <p:cNvCxnSpPr/>
           <p:nvPr/>
         </p:nvCxnSpPr>
         <p:spPr>
           <a:xfrm>
-            <a:off x="6661150" y="1952625"/>
-            <a:ext cx="603250" cy="0"/>
+            <a:off x="7766050" y="1949450"/>
+            <a:ext cx="2216150" cy="0"/>
           </a:xfrm>
           <a:prstGeom prst="line">
             <a:avLst/>
@@ -3371,132 +3248,14 @@
       </p:cxnSp>
       <p:sp>
         <p:nvSpPr>
-          <p:cNvPr id="14" name="source-correction"/>
-          <p:cNvSpPr/>
-          <p:nvPr/>
-        </p:nvSpPr>
-        <p:spPr>
-          <a:xfrm>
-            <a:off x="2349500" y="4521200"/>
-            <a:ext cx="1936750" cy="501650"/>
-          </a:xfrm>
-          <a:custGeom>
-            <a:avLst/>
-            <a:gdLst/>
-            <a:ahLst/>
-            <a:cxnLst/>
-            <a:rect l="l" t="t" r="r" b="b"/>
-            <a:pathLst>
-              <a:path w="1936750" h="501650">
-                <a:moveTo>
-                  <a:pt x="1917700" y="0"/>
-                </a:moveTo>
-                <a:lnTo>
-                  <a:pt x="1917700" y="330200"/>
-                </a:lnTo>
-                <a:cubicBezTo>
-                  <a:pt x="1917700" y="419100"/>
-                  <a:pt x="1847850" y="482600"/>
-                  <a:pt x="1758950" y="482600"/>
-                </a:cubicBezTo>
-                <a:lnTo>
-                  <a:pt x="234950" y="482600"/>
-                </a:lnTo>
-                <a:cubicBezTo>
-                  <a:pt x="146050" y="482600"/>
-                  <a:pt x="76200" y="419100"/>
-                  <a:pt x="76200" y="330200"/>
-                </a:cubicBezTo>
-                <a:lnTo>
-                  <a:pt x="76200" y="0"/>
-                </a:lnTo>
-              </a:path>
-            </a:pathLst>
-          </a:custGeom>
-          <a:solidFill>
-            <a:srgbClr val="FFFFFF">
-              <a:alpha val="0"/>
-            </a:srgbClr>
-          </a:solidFill>
-          <a:ln w="19050">
-            <a:solidFill>
-              <a:srgbClr val="FD5108"/>
-            </a:solidFill>
-            <a:prstDash val="solid"/>
-            <a:headEnd type="none"/>
-            <a:tailEnd type="triangle"/>
-          </a:ln>
-        </p:spPr>
-      </p:sp>
-      <p:sp>
-        <p:nvSpPr>
-          <p:cNvPr id="15" name="expert-rejection"/>
-          <p:cNvSpPr/>
-          <p:nvPr/>
-        </p:nvSpPr>
-        <p:spPr>
-          <a:xfrm>
-            <a:off x="4781550" y="4521200"/>
-            <a:ext cx="2044700" cy="501650"/>
-          </a:xfrm>
-          <a:custGeom>
-            <a:avLst/>
-            <a:gdLst/>
-            <a:ahLst/>
-            <a:cxnLst/>
-            <a:rect l="l" t="t" r="r" b="b"/>
-            <a:pathLst>
-              <a:path w="2044700" h="501650">
-                <a:moveTo>
-                  <a:pt x="2025650" y="0"/>
-                </a:moveTo>
-                <a:lnTo>
-                  <a:pt x="2025650" y="330200"/>
-                </a:lnTo>
-                <a:cubicBezTo>
-                  <a:pt x="2025650" y="419100"/>
-                  <a:pt x="1955800" y="482600"/>
-                  <a:pt x="1866900" y="482600"/>
-                </a:cubicBezTo>
-                <a:lnTo>
-                  <a:pt x="234950" y="482600"/>
-                </a:lnTo>
-                <a:cubicBezTo>
-                  <a:pt x="146050" y="482600"/>
-                  <a:pt x="76200" y="419100"/>
-                  <a:pt x="76200" y="330200"/>
-                </a:cubicBezTo>
-                <a:lnTo>
-                  <a:pt x="76200" y="0"/>
-                </a:lnTo>
-              </a:path>
-            </a:pathLst>
-          </a:custGeom>
-          <a:solidFill>
-            <a:srgbClr val="FFFFFF">
-              <a:alpha val="0"/>
-            </a:srgbClr>
-          </a:solidFill>
-          <a:ln w="19050">
-            <a:solidFill>
-              <a:srgbClr val="FD5108"/>
-            </a:solidFill>
-            <a:prstDash val="solid"/>
-            <a:headEnd type="none"/>
-            <a:tailEnd type="triangle"/>
-          </a:ln>
-        </p:spPr>
-      </p:sp>
-      <p:sp>
-        <p:nvSpPr>
-          <p:cNvPr id="16" name="headline"/>
+          <p:cNvPr id="9" name="headline"/>
           <p:cNvSpPr txBox="1"/>
           <p:nvPr/>
         </p:nvSpPr>
         <p:spPr>
           <a:xfrm>
-            <a:off x="304800" y="527050"/>
-            <a:ext cx="11582400" cy="508000"/>
+            <a:off x="292100" y="533400"/>
+            <a:ext cx="11607800" cy="482600"/>
           </a:xfrm>
           <a:prstGeom prst="rect">
             <a:avLst/>
@@ -3534,14 +3293,14 @@
       </p:sp>
       <p:sp>
         <p:nvSpPr>
-          <p:cNvPr id="17" name="subtitle"/>
+          <p:cNvPr id="10" name="subtitle"/>
           <p:cNvSpPr txBox="1"/>
           <p:nvPr/>
         </p:nvSpPr>
         <p:spPr>
           <a:xfrm>
-            <a:off x="304800" y="1060450"/>
-            <a:ext cx="11582400" cy="323850"/>
+            <a:off x="298450" y="1047750"/>
+            <a:ext cx="11588750" cy="304800"/>
           </a:xfrm>
           <a:prstGeom prst="rect">
             <a:avLst/>
@@ -3579,278 +3338,14 @@
       </p:sp>
       <p:sp>
         <p:nvSpPr>
-          <p:cNvPr id="18" name="stage-1-label"/>
+          <p:cNvPr id="11" name="stage-label-sources"/>
           <p:cNvSpPr txBox="1"/>
           <p:nvPr/>
         </p:nvSpPr>
         <p:spPr>
           <a:xfrm>
-            <a:off x="628650" y="1720850"/>
-            <a:ext cx="1492250" cy="488950"/>
-          </a:xfrm>
-          <a:prstGeom prst="rect">
-            <a:avLst/>
-          </a:prstGeom>
-          <a:noFill/>
-          <a:ln/>
-        </p:spPr>
-        <p:txBody>
-          <a:bodyPr wrap="square" lIns="12700" tIns="12700" rIns="12700" bIns="12700" rtlCol="0" anchor="t">
-            <a:noAutofit/>
-          </a:bodyPr>
-          <a:lstStyle/>
-          <a:p>
-            <a:pPr algn="ctr" indent="0" marL="0">
-              <a:lnSpc>
-                <a:spcPct val="95000"/>
-              </a:lnSpc>
-              <a:buNone/>
-              <a:defRPr spc="0"/>
-            </a:pPr>
-            <a:r>
-              <a:rPr lang="en-US" sz="1400" b="1" dirty="0" spc="0">
-                <a:solidFill>
-                  <a:srgbClr val="000000"/>
-                </a:solidFill>
-                <a:latin typeface="Arial" pitchFamily="34" charset="0"/>
-                <a:ea typeface="Arial" pitchFamily="34" charset="-122"/>
-                <a:cs typeface="Arial" pitchFamily="34" charset="-120"/>
-              </a:rPr>
-              <a:t>Approved</a:t>
-            </a:r>
-            <a:endParaRPr lang="en-US" sz="1400" dirty="0" spc="0"/>
-          </a:p>
-          <a:p>
-            <a:pPr algn="ctr" indent="0" marL="0">
-              <a:lnSpc>
-                <a:spcPct val="95000"/>
-              </a:lnSpc>
-              <a:buNone/>
-              <a:defRPr spc="0"/>
-            </a:pPr>
-            <a:r>
-              <a:rPr lang="en-US" sz="1400" b="1" dirty="0" spc="0">
-                <a:solidFill>
-                  <a:srgbClr val="000000"/>
-                </a:solidFill>
-                <a:latin typeface="Arial" pitchFamily="34" charset="0"/>
-                <a:ea typeface="Arial" pitchFamily="34" charset="-122"/>
-                <a:cs typeface="Arial" pitchFamily="34" charset="-120"/>
-              </a:rPr>
-              <a:t>sources</a:t>
-            </a:r>
-            <a:endParaRPr lang="en-US" sz="1400" dirty="0" spc="0"/>
-          </a:p>
-        </p:txBody>
-      </p:sp>
-      <p:sp>
-        <p:nvSpPr>
-          <p:cNvPr id="19" name="stage-2-label"/>
-          <p:cNvSpPr txBox="1"/>
-          <p:nvPr/>
-        </p:nvSpPr>
-        <p:spPr>
-          <a:xfrm>
-            <a:off x="2882900" y="1720850"/>
-            <a:ext cx="1479550" cy="488950"/>
-          </a:xfrm>
-          <a:prstGeom prst="rect">
-            <a:avLst/>
-          </a:prstGeom>
-          <a:noFill/>
-          <a:ln/>
-        </p:spPr>
-        <p:txBody>
-          <a:bodyPr wrap="square" lIns="12700" tIns="12700" rIns="12700" bIns="12700" rtlCol="0" anchor="t">
-            <a:noAutofit/>
-          </a:bodyPr>
-          <a:lstStyle/>
-          <a:p>
-            <a:pPr algn="ctr" indent="0" marL="0">
-              <a:lnSpc>
-                <a:spcPct val="95000"/>
-              </a:lnSpc>
-              <a:buNone/>
-              <a:defRPr spc="0"/>
-            </a:pPr>
-            <a:r>
-              <a:rPr lang="en-US" sz="1400" b="1" dirty="0" spc="0">
-                <a:solidFill>
-                  <a:srgbClr val="000000"/>
-                </a:solidFill>
-                <a:latin typeface="Arial" pitchFamily="34" charset="0"/>
-                <a:ea typeface="Arial" pitchFamily="34" charset="-122"/>
-                <a:cs typeface="Arial" pitchFamily="34" charset="-120"/>
-              </a:rPr>
-              <a:t>Grounded</a:t>
-            </a:r>
-            <a:endParaRPr lang="en-US" sz="1400" dirty="0" spc="0"/>
-          </a:p>
-          <a:p>
-            <a:pPr algn="ctr" indent="0" marL="0">
-              <a:lnSpc>
-                <a:spcPct val="95000"/>
-              </a:lnSpc>
-              <a:buNone/>
-              <a:defRPr spc="0"/>
-            </a:pPr>
-            <a:r>
-              <a:rPr lang="en-US" sz="1400" b="1" dirty="0" spc="0">
-                <a:solidFill>
-                  <a:srgbClr val="000000"/>
-                </a:solidFill>
-                <a:latin typeface="Arial" pitchFamily="34" charset="0"/>
-                <a:ea typeface="Arial" pitchFamily="34" charset="-122"/>
-                <a:cs typeface="Arial" pitchFamily="34" charset="-120"/>
-              </a:rPr>
-              <a:t>draft</a:t>
-            </a:r>
-            <a:endParaRPr lang="en-US" sz="1400" dirty="0" spc="0"/>
-          </a:p>
-        </p:txBody>
-      </p:sp>
-      <p:sp>
-        <p:nvSpPr>
-          <p:cNvPr id="20" name="stage-3-label"/>
-          <p:cNvSpPr txBox="1"/>
-          <p:nvPr/>
-        </p:nvSpPr>
-        <p:spPr>
-          <a:xfrm>
-            <a:off x="5105400" y="1720850"/>
-            <a:ext cx="1492250" cy="488950"/>
-          </a:xfrm>
-          <a:prstGeom prst="rect">
-            <a:avLst/>
-          </a:prstGeom>
-          <a:noFill/>
-          <a:ln/>
-        </p:spPr>
-        <p:txBody>
-          <a:bodyPr wrap="square" lIns="12700" tIns="12700" rIns="12700" bIns="12700" rtlCol="0" anchor="t">
-            <a:noAutofit/>
-          </a:bodyPr>
-          <a:lstStyle/>
-          <a:p>
-            <a:pPr algn="ctr" indent="0" marL="0">
-              <a:lnSpc>
-                <a:spcPct val="95000"/>
-              </a:lnSpc>
-              <a:buNone/>
-              <a:defRPr spc="0"/>
-            </a:pPr>
-            <a:r>
-              <a:rPr lang="en-US" sz="1400" b="1" dirty="0" spc="0">
-                <a:solidFill>
-                  <a:srgbClr val="000000"/>
-                </a:solidFill>
-                <a:latin typeface="Arial" pitchFamily="34" charset="0"/>
-                <a:ea typeface="Arial" pitchFamily="34" charset="-122"/>
-                <a:cs typeface="Arial" pitchFamily="34" charset="-120"/>
-              </a:rPr>
-              <a:t>Expert</a:t>
-            </a:r>
-            <a:endParaRPr lang="en-US" sz="1400" dirty="0" spc="0"/>
-          </a:p>
-          <a:p>
-            <a:pPr algn="ctr" indent="0" marL="0">
-              <a:lnSpc>
-                <a:spcPct val="95000"/>
-              </a:lnSpc>
-              <a:buNone/>
-              <a:defRPr spc="0"/>
-            </a:pPr>
-            <a:r>
-              <a:rPr lang="en-US" sz="1400" b="1" dirty="0" spc="0">
-                <a:solidFill>
-                  <a:srgbClr val="000000"/>
-                </a:solidFill>
-                <a:latin typeface="Arial" pitchFamily="34" charset="0"/>
-                <a:ea typeface="Arial" pitchFamily="34" charset="-122"/>
-                <a:cs typeface="Arial" pitchFamily="34" charset="-120"/>
-              </a:rPr>
-              <a:t>review</a:t>
-            </a:r>
-            <a:endParaRPr lang="en-US" sz="1400" dirty="0" spc="0"/>
-          </a:p>
-        </p:txBody>
-      </p:sp>
-      <p:sp>
-        <p:nvSpPr>
-          <p:cNvPr id="21" name="stage-4-label"/>
-          <p:cNvSpPr txBox="1"/>
-          <p:nvPr/>
-        </p:nvSpPr>
-        <p:spPr>
-          <a:xfrm>
-            <a:off x="7327900" y="1720850"/>
-            <a:ext cx="1676400" cy="488950"/>
-          </a:xfrm>
-          <a:prstGeom prst="rect">
-            <a:avLst/>
-          </a:prstGeom>
-          <a:noFill/>
-          <a:ln/>
-        </p:spPr>
-        <p:txBody>
-          <a:bodyPr wrap="square" lIns="12700" tIns="12700" rIns="12700" bIns="12700" rtlCol="0" anchor="t">
-            <a:noAutofit/>
-          </a:bodyPr>
-          <a:lstStyle/>
-          <a:p>
-            <a:pPr algn="ctr" indent="0" marL="0">
-              <a:lnSpc>
-                <a:spcPct val="95000"/>
-              </a:lnSpc>
-              <a:buNone/>
-              <a:defRPr spc="0"/>
-            </a:pPr>
-            <a:r>
-              <a:rPr lang="en-US" sz="1400" b="1" dirty="0" spc="0">
-                <a:solidFill>
-                  <a:srgbClr val="000000"/>
-                </a:solidFill>
-                <a:latin typeface="Arial" pitchFamily="34" charset="0"/>
-                <a:ea typeface="Arial" pitchFamily="34" charset="-122"/>
-                <a:cs typeface="Arial" pitchFamily="34" charset="-120"/>
-              </a:rPr>
-              <a:t>Client-ready</a:t>
-            </a:r>
-            <a:endParaRPr lang="en-US" sz="1400" dirty="0" spc="0"/>
-          </a:p>
-          <a:p>
-            <a:pPr algn="ctr" indent="0" marL="0">
-              <a:lnSpc>
-                <a:spcPct val="95000"/>
-              </a:lnSpc>
-              <a:buNone/>
-              <a:defRPr spc="0"/>
-            </a:pPr>
-            <a:r>
-              <a:rPr lang="en-US" sz="1400" b="1" dirty="0" spc="0">
-                <a:solidFill>
-                  <a:srgbClr val="000000"/>
-                </a:solidFill>
-                <a:latin typeface="Arial" pitchFamily="34" charset="0"/>
-                <a:ea typeface="Arial" pitchFamily="34" charset="-122"/>
-                <a:cs typeface="Arial" pitchFamily="34" charset="-120"/>
-              </a:rPr>
-              <a:t>output</a:t>
-            </a:r>
-            <a:endParaRPr lang="en-US" sz="1400" dirty="0" spc="0"/>
-          </a:p>
-        </p:txBody>
-      </p:sp>
-      <p:sp>
-        <p:nvSpPr>
-          <p:cNvPr id="22" name="source-correction-label"/>
-          <p:cNvSpPr txBox="1"/>
-          <p:nvPr/>
-        </p:nvSpPr>
-        <p:spPr>
-          <a:xfrm>
-            <a:off x="2070100" y="5080000"/>
-            <a:ext cx="2863850" cy="266700"/>
+            <a:off x="635000" y="2387600"/>
+            <a:ext cx="2032000" cy="266700"/>
           </a:xfrm>
           <a:prstGeom prst="rect">
             <a:avLst/>
@@ -3872,7 +3367,7 @@
               <a:defRPr spc="0"/>
             </a:pPr>
             <a:r>
-              <a:rPr lang="en-US" sz="1200" dirty="0" spc="0">
+              <a:rPr lang="en-US" sz="1250" b="1" dirty="0" spc="0">
                 <a:solidFill>
                   <a:srgbClr val="000000"/>
                 </a:solidFill>
@@ -3880,22 +3375,22 @@
                 <a:ea typeface="Arial" pitchFamily="34" charset="-122"/>
                 <a:cs typeface="Arial" pitchFamily="34" charset="-120"/>
               </a:rPr>
-              <a:t>Correct sources via exception register</a:t>
+              <a:t>Approved sources</a:t>
             </a:r>
-            <a:endParaRPr lang="en-US" sz="1200" dirty="0" spc="0"/>
+            <a:endParaRPr lang="en-US" sz="1250" dirty="0" spc="0"/>
           </a:p>
         </p:txBody>
       </p:sp>
       <p:sp>
         <p:nvSpPr>
-          <p:cNvPr id="23" name="expert-rejection-label"/>
+          <p:cNvPr id="12" name="stage-label-draft"/>
           <p:cNvSpPr txBox="1"/>
           <p:nvPr/>
         </p:nvSpPr>
         <p:spPr>
           <a:xfrm>
-            <a:off x="4978400" y="5080000"/>
-            <a:ext cx="2159000" cy="266700"/>
+            <a:off x="3365500" y="2387600"/>
+            <a:ext cx="2032000" cy="266700"/>
           </a:xfrm>
           <a:prstGeom prst="rect">
             <a:avLst/>
@@ -3917,7 +3412,187 @@
               <a:defRPr spc="0"/>
             </a:pPr>
             <a:r>
-              <a:rPr lang="en-US" sz="1200" dirty="0" spc="0">
+              <a:rPr lang="en-US" sz="1250" b="1" dirty="0" spc="0">
+                <a:solidFill>
+                  <a:srgbClr val="000000"/>
+                </a:solidFill>
+                <a:latin typeface="Arial" pitchFamily="34" charset="0"/>
+                <a:ea typeface="Arial" pitchFamily="34" charset="-122"/>
+                <a:cs typeface="Arial" pitchFamily="34" charset="-120"/>
+              </a:rPr>
+              <a:t>Grounded draft</a:t>
+            </a:r>
+            <a:endParaRPr lang="en-US" sz="1250" dirty="0" spc="0"/>
+          </a:p>
+        </p:txBody>
+      </p:sp>
+      <p:sp>
+        <p:nvSpPr>
+          <p:cNvPr id="13" name="stage-label-review"/>
+          <p:cNvSpPr txBox="1"/>
+          <p:nvPr/>
+        </p:nvSpPr>
+        <p:spPr>
+          <a:xfrm>
+            <a:off x="6508750" y="2387600"/>
+            <a:ext cx="2032000" cy="266700"/>
+          </a:xfrm>
+          <a:prstGeom prst="rect">
+            <a:avLst/>
+          </a:prstGeom>
+          <a:noFill/>
+          <a:ln/>
+        </p:spPr>
+        <p:txBody>
+          <a:bodyPr wrap="square" lIns="12700" tIns="12700" rIns="12700" bIns="12700" rtlCol="0" anchor="t">
+            <a:noAutofit/>
+          </a:bodyPr>
+          <a:lstStyle/>
+          <a:p>
+            <a:pPr algn="ctr" indent="0" marL="0">
+              <a:lnSpc>
+                <a:spcPct val="100000"/>
+              </a:lnSpc>
+              <a:buNone/>
+              <a:defRPr spc="0"/>
+            </a:pPr>
+            <a:r>
+              <a:rPr lang="en-US" sz="1250" b="1" dirty="0" spc="0">
+                <a:solidFill>
+                  <a:srgbClr val="000000"/>
+                </a:solidFill>
+                <a:latin typeface="Arial" pitchFamily="34" charset="0"/>
+                <a:ea typeface="Arial" pitchFamily="34" charset="-122"/>
+                <a:cs typeface="Arial" pitchFamily="34" charset="-120"/>
+              </a:rPr>
+              <a:t>Expert review</a:t>
+            </a:r>
+            <a:endParaRPr lang="en-US" sz="1250" dirty="0" spc="0"/>
+          </a:p>
+        </p:txBody>
+      </p:sp>
+      <p:sp>
+        <p:nvSpPr>
+          <p:cNvPr id="14" name="stage-label-output"/>
+          <p:cNvSpPr txBox="1"/>
+          <p:nvPr/>
+        </p:nvSpPr>
+        <p:spPr>
+          <a:xfrm>
+            <a:off x="9207500" y="2387600"/>
+            <a:ext cx="2032000" cy="266700"/>
+          </a:xfrm>
+          <a:prstGeom prst="rect">
+            <a:avLst/>
+          </a:prstGeom>
+          <a:noFill/>
+          <a:ln/>
+        </p:spPr>
+        <p:txBody>
+          <a:bodyPr wrap="square" lIns="12700" tIns="12700" rIns="12700" bIns="12700" rtlCol="0" anchor="t">
+            <a:noAutofit/>
+          </a:bodyPr>
+          <a:lstStyle/>
+          <a:p>
+            <a:pPr algn="ctr" indent="0" marL="0">
+              <a:lnSpc>
+                <a:spcPct val="100000"/>
+              </a:lnSpc>
+              <a:buNone/>
+              <a:defRPr spc="0"/>
+            </a:pPr>
+            <a:r>
+              <a:rPr lang="en-US" sz="1250" b="1" dirty="0" spc="0">
+                <a:solidFill>
+                  <a:srgbClr val="000000"/>
+                </a:solidFill>
+                <a:latin typeface="Arial" pitchFamily="34" charset="0"/>
+                <a:ea typeface="Arial" pitchFamily="34" charset="-122"/>
+                <a:cs typeface="Arial" pitchFamily="34" charset="-120"/>
+              </a:rPr>
+              <a:t>Client-ready output</a:t>
+            </a:r>
+            <a:endParaRPr lang="en-US" sz="1250" dirty="0" spc="0"/>
+          </a:p>
+        </p:txBody>
+      </p:sp>
+      <p:sp>
+        <p:nvSpPr>
+          <p:cNvPr id="15" name="source-return-label"/>
+          <p:cNvSpPr txBox="1"/>
+          <p:nvPr/>
+        </p:nvSpPr>
+        <p:spPr>
+          <a:xfrm>
+            <a:off x="1905000" y="1365250"/>
+            <a:ext cx="2730500" cy="203200"/>
+          </a:xfrm>
+          <a:prstGeom prst="rect">
+            <a:avLst/>
+          </a:prstGeom>
+          <a:noFill/>
+          <a:ln/>
+        </p:spPr>
+        <p:txBody>
+          <a:bodyPr wrap="square" lIns="12700" tIns="12700" rIns="12700" bIns="12700" rtlCol="0" anchor="t">
+            <a:noAutofit/>
+          </a:bodyPr>
+          <a:lstStyle/>
+          <a:p>
+            <a:pPr algn="ctr" indent="0" marL="0">
+              <a:lnSpc>
+                <a:spcPct val="100000"/>
+              </a:lnSpc>
+              <a:buNone/>
+              <a:defRPr spc="0"/>
+            </a:pPr>
+            <a:r>
+              <a:rPr lang="en-US" sz="1050" b="1" dirty="0" spc="0">
+                <a:solidFill>
+                  <a:srgbClr val="000000"/>
+                </a:solidFill>
+                <a:latin typeface="Arial" pitchFamily="34" charset="0"/>
+                <a:ea typeface="Arial" pitchFamily="34" charset="-122"/>
+                <a:cs typeface="Arial" pitchFamily="34" charset="-120"/>
+              </a:rPr>
+              <a:t>Correct sources via exception register</a:t>
+            </a:r>
+            <a:endParaRPr lang="en-US" sz="1050" dirty="0" spc="0"/>
+          </a:p>
+        </p:txBody>
+      </p:sp>
+      <p:sp>
+        <p:nvSpPr>
+          <p:cNvPr id="16" name="review-return-label"/>
+          <p:cNvSpPr txBox="1"/>
+          <p:nvPr/>
+        </p:nvSpPr>
+        <p:spPr>
+          <a:xfrm>
+            <a:off x="5016500" y="1365250"/>
+            <a:ext cx="2730500" cy="203200"/>
+          </a:xfrm>
+          <a:prstGeom prst="rect">
+            <a:avLst/>
+          </a:prstGeom>
+          <a:noFill/>
+          <a:ln/>
+        </p:spPr>
+        <p:txBody>
+          <a:bodyPr wrap="square" lIns="12700" tIns="12700" rIns="12700" bIns="12700" rtlCol="0" anchor="t">
+            <a:noAutofit/>
+          </a:bodyPr>
+          <a:lstStyle/>
+          <a:p>
+            <a:pPr algn="ctr" indent="0" marL="0">
+              <a:lnSpc>
+                <a:spcPct val="100000"/>
+              </a:lnSpc>
+              <a:buNone/>
+              <a:defRPr spc="0"/>
+            </a:pPr>
+            <a:r>
+              <a:rPr lang="en-US" sz="1050" b="1" dirty="0" spc="0">
                 <a:solidFill>
                   <a:srgbClr val="000000"/>
                 </a:solidFill>
@@ -3927,20 +3602,20 @@
               </a:rPr>
               <a:t>Reject with defect reasons</a:t>
             </a:r>
-            <a:endParaRPr lang="en-US" sz="1200" dirty="0" spc="0"/>
+            <a:endParaRPr lang="en-US" sz="1050" dirty="0" spc="0"/>
           </a:p>
         </p:txBody>
       </p:sp>
       <p:sp>
         <p:nvSpPr>
-          <p:cNvPr id="24" name="shared-controls-heading"/>
+          <p:cNvPr id="17" name="shared-controls-heading"/>
           <p:cNvSpPr txBox="1"/>
           <p:nvPr/>
         </p:nvSpPr>
         <p:spPr>
           <a:xfrm>
-            <a:off x="9620250" y="2019300"/>
-            <a:ext cx="2266950" cy="292100"/>
+            <a:off x="292100" y="4851400"/>
+            <a:ext cx="5016500" cy="222250"/>
           </a:xfrm>
           <a:prstGeom prst="rect">
             <a:avLst/>
@@ -3962,7 +3637,7 @@
               <a:defRPr spc="0"/>
             </a:pPr>
             <a:r>
-              <a:rPr lang="en-US" sz="1400" b="1" dirty="0" spc="0">
+              <a:rPr lang="en-US" sz="1250" b="1" dirty="0" spc="0">
                 <a:solidFill>
                   <a:srgbClr val="000000"/>
                 </a:solidFill>
@@ -3972,20 +3647,20 @@
               </a:rPr>
               <a:t>SHARED CONTROLS</a:t>
             </a:r>
-            <a:endParaRPr lang="en-US" sz="1400" dirty="0" spc="0"/>
+            <a:endParaRPr lang="en-US" sz="1250" dirty="0" spc="0"/>
           </a:p>
         </p:txBody>
       </p:sp>
       <p:sp>
         <p:nvSpPr>
-          <p:cNvPr id="25" name="shared-register"/>
+          <p:cNvPr id="18" name="shared-controls"/>
           <p:cNvSpPr txBox="1"/>
           <p:nvPr/>
         </p:nvSpPr>
         <p:spPr>
           <a:xfrm>
-            <a:off x="9779000" y="2336800"/>
-            <a:ext cx="2101850" cy="584200"/>
+            <a:off x="292100" y="5092700"/>
+            <a:ext cx="5080000" cy="444500"/>
           </a:xfrm>
           <a:prstGeom prst="rect">
             <a:avLst/>
@@ -4001,13 +3676,13 @@
           <a:p>
             <a:pPr algn="l" indent="0" marL="0">
               <a:lnSpc>
-                <a:spcPct val="85000"/>
+                <a:spcPct val="115000"/>
               </a:lnSpc>
               <a:buNone/>
               <a:defRPr spc="0"/>
             </a:pPr>
             <a:r>
-              <a:rPr lang="en-US" sz="1400" dirty="0" spc="0">
+              <a:rPr lang="en-US" sz="1050" dirty="0" spc="0">
                 <a:solidFill>
                   <a:srgbClr val="000000"/>
                 </a:solidFill>
@@ -4015,20 +3690,20 @@
                 <a:ea typeface="Arial" pitchFamily="34" charset="-122"/>
                 <a:cs typeface="Arial" pitchFamily="34" charset="-120"/>
               </a:rPr>
-              <a:t>One register records</a:t>
+              <a:t>• One register records defects, owners and disposition.</a:t>
             </a:r>
-            <a:endParaRPr lang="en-US" sz="1400" dirty="0" spc="0"/>
+            <a:endParaRPr lang="en-US" sz="1050" dirty="0" spc="0"/>
           </a:p>
           <a:p>
             <a:pPr algn="l" indent="0" marL="0">
               <a:lnSpc>
-                <a:spcPct val="85000"/>
+                <a:spcPct val="115000"/>
               </a:lnSpc>
               <a:buNone/>
               <a:defRPr spc="0"/>
             </a:pPr>
             <a:r>
-              <a:rPr lang="en-US" sz="1400" dirty="0" spc="0">
+              <a:rPr lang="en-US" sz="1050" dirty="0" spc="0">
                 <a:solidFill>
                   <a:srgbClr val="000000"/>
                 </a:solidFill>
@@ -4036,130 +3711,22 @@
                 <a:ea typeface="Arial" pitchFamily="34" charset="-122"/>
                 <a:cs typeface="Arial" pitchFamily="34" charset="-120"/>
               </a:rPr>
-              <a:t>defects, owners and</a:t>
+              <a:t>• Platform team maintains access controls and audit logs.</a:t>
             </a:r>
-            <a:endParaRPr lang="en-US" sz="1400" dirty="0" spc="0"/>
-          </a:p>
-          <a:p>
-            <a:pPr algn="l" indent="0" marL="0">
-              <a:lnSpc>
-                <a:spcPct val="85000"/>
-              </a:lnSpc>
-              <a:buNone/>
-              <a:defRPr spc="0"/>
-            </a:pPr>
-            <a:r>
-              <a:rPr lang="en-US" sz="1400" dirty="0" spc="0">
-                <a:solidFill>
-                  <a:srgbClr val="000000"/>
-                </a:solidFill>
-                <a:latin typeface="Arial" pitchFamily="34" charset="0"/>
-                <a:ea typeface="Arial" pitchFamily="34" charset="-122"/>
-                <a:cs typeface="Arial" pitchFamily="34" charset="-120"/>
-              </a:rPr>
-              <a:t>disposition.</a:t>
-            </a:r>
-            <a:endParaRPr lang="en-US" sz="1400" dirty="0" spc="0"/>
+            <a:endParaRPr lang="en-US" sz="1050" dirty="0" spc="0"/>
           </a:p>
         </p:txBody>
       </p:sp>
       <p:sp>
         <p:nvSpPr>
-          <p:cNvPr id="26" name="platform-controls"/>
+          <p:cNvPr id="19" name="measurement-heading"/>
           <p:cNvSpPr txBox="1"/>
           <p:nvPr/>
         </p:nvSpPr>
         <p:spPr>
           <a:xfrm>
-            <a:off x="9779000" y="2895600"/>
-            <a:ext cx="2101850" cy="571500"/>
-          </a:xfrm>
-          <a:prstGeom prst="rect">
-            <a:avLst/>
-          </a:prstGeom>
-          <a:noFill/>
-          <a:ln/>
-        </p:spPr>
-        <p:txBody>
-          <a:bodyPr wrap="square" lIns="12700" tIns="12700" rIns="12700" bIns="12700" rtlCol="0" anchor="t">
-            <a:noAutofit/>
-          </a:bodyPr>
-          <a:lstStyle/>
-          <a:p>
-            <a:pPr algn="l" indent="0" marL="0">
-              <a:lnSpc>
-                <a:spcPct val="85000"/>
-              </a:lnSpc>
-              <a:buNone/>
-              <a:defRPr spc="0"/>
-            </a:pPr>
-            <a:r>
-              <a:rPr lang="en-US" sz="1400" dirty="0" spc="0">
-                <a:solidFill>
-                  <a:srgbClr val="000000"/>
-                </a:solidFill>
-                <a:latin typeface="Arial" pitchFamily="34" charset="0"/>
-                <a:ea typeface="Arial" pitchFamily="34" charset="-122"/>
-                <a:cs typeface="Arial" pitchFamily="34" charset="-120"/>
-              </a:rPr>
-              <a:t>Platform team maintains</a:t>
-            </a:r>
-            <a:endParaRPr lang="en-US" sz="1400" dirty="0" spc="0"/>
-          </a:p>
-          <a:p>
-            <a:pPr algn="l" indent="0" marL="0">
-              <a:lnSpc>
-                <a:spcPct val="85000"/>
-              </a:lnSpc>
-              <a:buNone/>
-              <a:defRPr spc="0"/>
-            </a:pPr>
-            <a:r>
-              <a:rPr lang="en-US" sz="1400" dirty="0" spc="0">
-                <a:solidFill>
-                  <a:srgbClr val="000000"/>
-                </a:solidFill>
-                <a:latin typeface="Arial" pitchFamily="34" charset="0"/>
-                <a:ea typeface="Arial" pitchFamily="34" charset="-122"/>
-                <a:cs typeface="Arial" pitchFamily="34" charset="-120"/>
-              </a:rPr>
-              <a:t>access controls and</a:t>
-            </a:r>
-            <a:endParaRPr lang="en-US" sz="1400" dirty="0" spc="0"/>
-          </a:p>
-          <a:p>
-            <a:pPr algn="l" indent="0" marL="0">
-              <a:lnSpc>
-                <a:spcPct val="85000"/>
-              </a:lnSpc>
-              <a:buNone/>
-              <a:defRPr spc="0"/>
-            </a:pPr>
-            <a:r>
-              <a:rPr lang="en-US" sz="1400" dirty="0" spc="0">
-                <a:solidFill>
-                  <a:srgbClr val="000000"/>
-                </a:solidFill>
-                <a:latin typeface="Arial" pitchFamily="34" charset="0"/>
-                <a:ea typeface="Arial" pitchFamily="34" charset="-122"/>
-                <a:cs typeface="Arial" pitchFamily="34" charset="-120"/>
-              </a:rPr>
-              <a:t>audit logs.</a:t>
-            </a:r>
-            <a:endParaRPr lang="en-US" sz="1400" dirty="0" spc="0"/>
-          </a:p>
-        </p:txBody>
-      </p:sp>
-      <p:sp>
-        <p:nvSpPr>
-          <p:cNvPr id="27" name="measurement-heading"/>
-          <p:cNvSpPr txBox="1"/>
-          <p:nvPr/>
-        </p:nvSpPr>
-        <p:spPr>
-          <a:xfrm>
-            <a:off x="9620250" y="3670300"/>
-            <a:ext cx="2266950" cy="292100"/>
+            <a:off x="6000750" y="4851400"/>
+            <a:ext cx="5397500" cy="222250"/>
           </a:xfrm>
           <a:prstGeom prst="rect">
             <a:avLst/>
@@ -4181,7 +3748,7 @@
               <a:defRPr spc="0"/>
             </a:pPr>
             <a:r>
-              <a:rPr lang="en-US" sz="1400" b="1" dirty="0" spc="0">
+              <a:rPr lang="en-US" sz="1250" b="1" dirty="0" spc="0">
                 <a:solidFill>
                   <a:srgbClr val="000000"/>
                 </a:solidFill>
@@ -4191,20 +3758,20 @@
               </a:rPr>
               <a:t>PILOT MEASUREMENT</a:t>
             </a:r>
-            <a:endParaRPr lang="en-US" sz="1400" dirty="0" spc="0"/>
+            <a:endParaRPr lang="en-US" sz="1250" dirty="0" spc="0"/>
           </a:p>
         </p:txBody>
       </p:sp>
       <p:sp>
         <p:nvSpPr>
-          <p:cNvPr id="28" name="baseline-measurement"/>
+          <p:cNvPr id="20" name="measurement"/>
           <p:cNvSpPr txBox="1"/>
           <p:nvPr/>
         </p:nvSpPr>
         <p:spPr>
           <a:xfrm>
-            <a:off x="9779000" y="4006850"/>
-            <a:ext cx="2101850" cy="584200"/>
+            <a:off x="6000750" y="5092700"/>
+            <a:ext cx="5397500" cy="444500"/>
           </a:xfrm>
           <a:prstGeom prst="rect">
             <a:avLst/>
@@ -4220,13 +3787,13 @@
           <a:p>
             <a:pPr algn="l" indent="0" marL="0">
               <a:lnSpc>
-                <a:spcPct val="85000"/>
+                <a:spcPct val="115000"/>
               </a:lnSpc>
               <a:buNone/>
               <a:defRPr spc="0"/>
             </a:pPr>
             <a:r>
-              <a:rPr lang="en-US" sz="1400" dirty="0" spc="0">
+              <a:rPr lang="en-US" sz="1050" dirty="0" spc="0">
                 <a:solidFill>
                   <a:srgbClr val="000000"/>
                 </a:solidFill>
@@ -4234,20 +3801,20 @@
                 <a:ea typeface="Arial" pitchFamily="34" charset="-122"/>
                 <a:cs typeface="Arial" pitchFamily="34" charset="-120"/>
               </a:rPr>
-              <a:t>Compare 20 paired</a:t>
+              <a:t>• Compare 20 paired tasks with baseline time logs.</a:t>
             </a:r>
-            <a:endParaRPr lang="en-US" sz="1400" dirty="0" spc="0"/>
+            <a:endParaRPr lang="en-US" sz="1050" dirty="0" spc="0"/>
           </a:p>
           <a:p>
             <a:pPr algn="l" indent="0" marL="0">
               <a:lnSpc>
-                <a:spcPct val="85000"/>
+                <a:spcPct val="115000"/>
               </a:lnSpc>
               <a:buNone/>
               <a:defRPr spc="0"/>
             </a:pPr>
             <a:r>
-              <a:rPr lang="en-US" sz="1400" dirty="0" spc="0">
+              <a:rPr lang="en-US" sz="1050" dirty="0" spc="0">
                 <a:solidFill>
                   <a:srgbClr val="000000"/>
                 </a:solidFill>
@@ -4255,238 +3822,22 @@
                 <a:ea typeface="Arial" pitchFamily="34" charset="-122"/>
                 <a:cs typeface="Arial" pitchFamily="34" charset="-120"/>
               </a:rPr>
-              <a:t>tasks with baseline time</a:t>
+              <a:t>• Verify claim samples and record expert review effort.</a:t>
             </a:r>
-            <a:endParaRPr lang="en-US" sz="1400" dirty="0" spc="0"/>
-          </a:p>
-          <a:p>
-            <a:pPr algn="l" indent="0" marL="0">
-              <a:lnSpc>
-                <a:spcPct val="85000"/>
-              </a:lnSpc>
-              <a:buNone/>
-              <a:defRPr spc="0"/>
-            </a:pPr>
-            <a:r>
-              <a:rPr lang="en-US" sz="1400" dirty="0" spc="0">
-                <a:solidFill>
-                  <a:srgbClr val="000000"/>
-                </a:solidFill>
-                <a:latin typeface="Arial" pitchFamily="34" charset="0"/>
-                <a:ea typeface="Arial" pitchFamily="34" charset="-122"/>
-                <a:cs typeface="Arial" pitchFamily="34" charset="-120"/>
-              </a:rPr>
-              <a:t>logs.</a:t>
-            </a:r>
-            <a:endParaRPr lang="en-US" sz="1400" dirty="0" spc="0"/>
+            <a:endParaRPr lang="en-US" sz="1050" dirty="0" spc="0"/>
           </a:p>
         </p:txBody>
       </p:sp>
       <p:sp>
         <p:nvSpPr>
-          <p:cNvPr id="29" name="review-measurement"/>
+          <p:cNvPr id="21" name="decision-label"/>
           <p:cNvSpPr txBox="1"/>
           <p:nvPr/>
         </p:nvSpPr>
         <p:spPr>
           <a:xfrm>
-            <a:off x="9779000" y="4603750"/>
-            <a:ext cx="2101850" cy="584200"/>
-          </a:xfrm>
-          <a:prstGeom prst="rect">
-            <a:avLst/>
-          </a:prstGeom>
-          <a:noFill/>
-          <a:ln/>
-        </p:spPr>
-        <p:txBody>
-          <a:bodyPr wrap="square" lIns="12700" tIns="12700" rIns="12700" bIns="12700" rtlCol="0" anchor="t">
-            <a:noAutofit/>
-          </a:bodyPr>
-          <a:lstStyle/>
-          <a:p>
-            <a:pPr algn="l" indent="0" marL="0">
-              <a:lnSpc>
-                <a:spcPct val="85000"/>
-              </a:lnSpc>
-              <a:buNone/>
-              <a:defRPr spc="0"/>
-            </a:pPr>
-            <a:r>
-              <a:rPr lang="en-US" sz="1400" dirty="0" spc="0">
-                <a:solidFill>
-                  <a:srgbClr val="000000"/>
-                </a:solidFill>
-                <a:latin typeface="Arial" pitchFamily="34" charset="0"/>
-                <a:ea typeface="Arial" pitchFamily="34" charset="-122"/>
-                <a:cs typeface="Arial" pitchFamily="34" charset="-120"/>
-              </a:rPr>
-              <a:t>Verify claim samples</a:t>
-            </a:r>
-            <a:endParaRPr lang="en-US" sz="1400" dirty="0" spc="0"/>
-          </a:p>
-          <a:p>
-            <a:pPr algn="l" indent="0" marL="0">
-              <a:lnSpc>
-                <a:spcPct val="85000"/>
-              </a:lnSpc>
-              <a:buNone/>
-              <a:defRPr spc="0"/>
-            </a:pPr>
-            <a:r>
-              <a:rPr lang="en-US" sz="1400" dirty="0" spc="0">
-                <a:solidFill>
-                  <a:srgbClr val="000000"/>
-                </a:solidFill>
-                <a:latin typeface="Arial" pitchFamily="34" charset="0"/>
-                <a:ea typeface="Arial" pitchFamily="34" charset="-122"/>
-                <a:cs typeface="Arial" pitchFamily="34" charset="-120"/>
-              </a:rPr>
-              <a:t>and record expert review</a:t>
-            </a:r>
-            <a:endParaRPr lang="en-US" sz="1400" dirty="0" spc="0"/>
-          </a:p>
-          <a:p>
-            <a:pPr algn="l" indent="0" marL="0">
-              <a:lnSpc>
-                <a:spcPct val="85000"/>
-              </a:lnSpc>
-              <a:buNone/>
-              <a:defRPr spc="0"/>
-            </a:pPr>
-            <a:r>
-              <a:rPr lang="en-US" sz="1400" dirty="0" spc="0">
-                <a:solidFill>
-                  <a:srgbClr val="000000"/>
-                </a:solidFill>
-                <a:latin typeface="Arial" pitchFamily="34" charset="0"/>
-                <a:ea typeface="Arial" pitchFamily="34" charset="-122"/>
-                <a:cs typeface="Arial" pitchFamily="34" charset="-120"/>
-              </a:rPr>
-              <a:t>effort.</a:t>
-            </a:r>
-            <a:endParaRPr lang="en-US" sz="1400" dirty="0" spc="0"/>
-          </a:p>
-        </p:txBody>
-      </p:sp>
-      <p:sp>
-        <p:nvSpPr>
-          <p:cNvPr id="30" name="list-bullet-1"/>
-          <p:cNvSpPr/>
-          <p:nvPr/>
-        </p:nvSpPr>
-        <p:spPr>
-          <a:xfrm>
-            <a:off x="9632950" y="2413000"/>
-            <a:ext cx="50800" cy="50800"/>
-          </a:xfrm>
-          <a:prstGeom prst="ellipse">
-            <a:avLst/>
-          </a:prstGeom>
-          <a:solidFill>
-            <a:srgbClr val="000000"/>
-          </a:solidFill>
-          <a:ln w="12700">
-            <a:solidFill>
-              <a:srgbClr val="FFFFFF">
-                <a:alpha val="0"/>
-              </a:srgbClr>
-            </a:solidFill>
-            <a:prstDash val="solid"/>
-          </a:ln>
-        </p:spPr>
-      </p:sp>
-      <p:sp>
-        <p:nvSpPr>
-          <p:cNvPr id="31" name="list-bullet-2"/>
-          <p:cNvSpPr/>
-          <p:nvPr/>
-        </p:nvSpPr>
-        <p:spPr>
-          <a:xfrm>
-            <a:off x="9632950" y="2971800"/>
-            <a:ext cx="50800" cy="50800"/>
-          </a:xfrm>
-          <a:prstGeom prst="ellipse">
-            <a:avLst/>
-          </a:prstGeom>
-          <a:solidFill>
-            <a:srgbClr val="000000"/>
-          </a:solidFill>
-          <a:ln w="12700">
-            <a:solidFill>
-              <a:srgbClr val="FFFFFF">
-                <a:alpha val="0"/>
-              </a:srgbClr>
-            </a:solidFill>
-            <a:prstDash val="solid"/>
-          </a:ln>
-        </p:spPr>
-      </p:sp>
-      <p:sp>
-        <p:nvSpPr>
-          <p:cNvPr id="32" name="list-bullet-3"/>
-          <p:cNvSpPr/>
-          <p:nvPr/>
-        </p:nvSpPr>
-        <p:spPr>
-          <a:xfrm>
-            <a:off x="9632950" y="4083050"/>
-            <a:ext cx="50800" cy="50800"/>
-          </a:xfrm>
-          <a:prstGeom prst="ellipse">
-            <a:avLst/>
-          </a:prstGeom>
-          <a:solidFill>
-            <a:srgbClr val="000000"/>
-          </a:solidFill>
-          <a:ln w="12700">
-            <a:solidFill>
-              <a:srgbClr val="FFFFFF">
-                <a:alpha val="0"/>
-              </a:srgbClr>
-            </a:solidFill>
-            <a:prstDash val="solid"/>
-          </a:ln>
-        </p:spPr>
-      </p:sp>
-      <p:sp>
-        <p:nvSpPr>
-          <p:cNvPr id="33" name="list-bullet-4"/>
-          <p:cNvSpPr/>
-          <p:nvPr/>
-        </p:nvSpPr>
-        <p:spPr>
-          <a:xfrm>
-            <a:off x="9632950" y="4679950"/>
-            <a:ext cx="50800" cy="50800"/>
-          </a:xfrm>
-          <a:prstGeom prst="ellipse">
-            <a:avLst/>
-          </a:prstGeom>
-          <a:solidFill>
-            <a:srgbClr val="000000"/>
-          </a:solidFill>
-          <a:ln w="12700">
-            <a:solidFill>
-              <a:srgbClr val="FFFFFF">
-                <a:alpha val="0"/>
-              </a:srgbClr>
-            </a:solidFill>
-            <a:prstDash val="solid"/>
-          </a:ln>
-        </p:spPr>
-      </p:sp>
-      <p:sp>
-        <p:nvSpPr>
-          <p:cNvPr id="34" name="decision-label"/>
-          <p:cNvSpPr txBox="1"/>
-          <p:nvPr/>
-        </p:nvSpPr>
-        <p:spPr>
-          <a:xfrm>
-            <a:off x="635000" y="5689600"/>
-            <a:ext cx="2667000" cy="330200"/>
+            <a:off x="508000" y="5822950"/>
+            <a:ext cx="2730500" cy="317500"/>
           </a:xfrm>
           <a:prstGeom prst="rect">
             <a:avLst/>
@@ -4524,14 +3875,14 @@
       </p:sp>
       <p:sp>
         <p:nvSpPr>
-          <p:cNvPr id="35" name="decision-message"/>
+          <p:cNvPr id="22" name="decision-message"/>
           <p:cNvSpPr txBox="1"/>
           <p:nvPr/>
         </p:nvSpPr>
         <p:spPr>
           <a:xfrm>
-            <a:off x="3556000" y="5689600"/>
-            <a:ext cx="8032750" cy="330200"/>
+            <a:off x="3302000" y="5822950"/>
+            <a:ext cx="8369300" cy="317500"/>
           </a:xfrm>
           <a:prstGeom prst="rect">
             <a:avLst/>
@@ -4567,9 +3918,129 @@
           </a:p>
         </p:txBody>
       </p:sp>
+      <p:pic>
+        <p:nvPicPr>
+          <p:cNvPr id="23" name="stage-icon-sources" descr="remix-file-search-line">    </p:cNvPr>
+          <p:cNvPicPr>
+            <a:picLocks noChangeAspect="1"/>
+          </p:cNvPicPr>
+          <p:nvPr/>
+        </p:nvPicPr>
+        <p:blipFill>
+          <a:blip r:embed="rId1">
+            <a:extLst>
+              <a:ext uri="{96DAC541-7B7A-43D3-8B79-37D633B846F1}">
+                <asvg:svgBlip xmlns:asvg="http://schemas.microsoft.com/office/drawing/2016/SVG/main" r:embed="rId2"/>
+              </a:ext>
+            </a:extLst>
+          </a:blip>
+          <a:stretch>
+            <a:fillRect/>
+          </a:stretch>
+        </p:blipFill>
+        <p:spPr>
+          <a:xfrm>
+            <a:off x="1428750" y="1727200"/>
+            <a:ext cx="444500" cy="444500"/>
+          </a:xfrm>
+          <a:prstGeom prst="rect">
+            <a:avLst/>
+          </a:prstGeom>
+        </p:spPr>
+      </p:pic>
+      <p:pic>
+        <p:nvPicPr>
+          <p:cNvPr id="24" name="stage-icon-draft" descr="remix-draft-line">    </p:cNvPr>
+          <p:cNvPicPr>
+            <a:picLocks noChangeAspect="1"/>
+          </p:cNvPicPr>
+          <p:nvPr/>
+        </p:nvPicPr>
+        <p:blipFill>
+          <a:blip r:embed="rId3">
+            <a:extLst>
+              <a:ext uri="{96DAC541-7B7A-43D3-8B79-37D633B846F1}">
+                <asvg:svgBlip xmlns:asvg="http://schemas.microsoft.com/office/drawing/2016/SVG/main" r:embed="rId4"/>
+              </a:ext>
+            </a:extLst>
+          </a:blip>
+          <a:stretch>
+            <a:fillRect/>
+          </a:stretch>
+        </p:blipFill>
+        <p:spPr>
+          <a:xfrm>
+            <a:off x="4159250" y="1727200"/>
+            <a:ext cx="444500" cy="444500"/>
+          </a:xfrm>
+          <a:prstGeom prst="rect">
+            <a:avLst/>
+          </a:prstGeom>
+        </p:spPr>
+      </p:pic>
+      <p:pic>
+        <p:nvPicPr>
+          <p:cNvPr id="25" name="stage-icon-review" descr="remix-shield-check-line">    </p:cNvPr>
+          <p:cNvPicPr>
+            <a:picLocks noChangeAspect="1"/>
+          </p:cNvPicPr>
+          <p:nvPr/>
+        </p:nvPicPr>
+        <p:blipFill>
+          <a:blip r:embed="rId5">
+            <a:extLst>
+              <a:ext uri="{96DAC541-7B7A-43D3-8B79-37D633B846F1}">
+                <asvg:svgBlip xmlns:asvg="http://schemas.microsoft.com/office/drawing/2016/SVG/main" r:embed="rId6"/>
+              </a:ext>
+            </a:extLst>
+          </a:blip>
+          <a:stretch>
+            <a:fillRect/>
+          </a:stretch>
+        </p:blipFill>
+        <p:spPr>
+          <a:xfrm>
+            <a:off x="7302500" y="1727200"/>
+            <a:ext cx="444500" cy="444500"/>
+          </a:xfrm>
+          <a:prstGeom prst="rect">
+            <a:avLst/>
+          </a:prstGeom>
+        </p:spPr>
+      </p:pic>
+      <p:pic>
+        <p:nvPicPr>
+          <p:cNvPr id="26" name="stage-icon-output" descr="remix-send-plane-2-line">    </p:cNvPr>
+          <p:cNvPicPr>
+            <a:picLocks noChangeAspect="1"/>
+          </p:cNvPicPr>
+          <p:nvPr/>
+        </p:nvPicPr>
+        <p:blipFill>
+          <a:blip r:embed="rId7">
+            <a:extLst>
+              <a:ext uri="{96DAC541-7B7A-43D3-8B79-37D633B846F1}">
+                <asvg:svgBlip xmlns:asvg="http://schemas.microsoft.com/office/drawing/2016/SVG/main" r:embed="rId8"/>
+              </a:ext>
+            </a:extLst>
+          </a:blip>
+          <a:stretch>
+            <a:fillRect/>
+          </a:stretch>
+        </p:blipFill>
+        <p:spPr>
+          <a:xfrm>
+            <a:off x="10001250" y="1727200"/>
+            <a:ext cx="444500" cy="444500"/>
+          </a:xfrm>
+          <a:prstGeom prst="rect">
+            <a:avLst/>
+          </a:prstGeom>
+        </p:spPr>
+      </p:pic>
       <p:sp>
         <p:nvSpPr>
-          <p:cNvPr id="36" name="Slide Number Placeholder 0"/>
+          <p:cNvPr id="27" name="Slide Number Placeholder 0"/>
           <p:cNvSpPr>
             <a:spLocks noGrp="1"/>
           </p:cNvSpPr>

--- a/examples/consulting-ai-transformation/run/slides/s03-operating-model/deliverables/slide.pptx
+++ b/examples/consulting-ai-transformation/run/slides/s03-operating-model/deliverables/slide.pptx
@@ -503,9 +503,9 @@
             <a:r>
               <a:rPr lang="en-US" dirty="0"/>
               <a:t>This is an illustrative planning scenario. Twenty paired tasks represent one research task from each of twenty pilot engagements, with ten tasks at the week-eight interim review. The sampled 95% claim-verification gate measures pilot quality. Every client claim still requires expert sign-off and every client release requires engagement-lead approval.
-The two curved feedback paths are editable native freeforms. They preserve the observed direction and curve geometry, but moving the table or its columns in Office does not automatically reattach these paths.
+Rejected drafts return to the drafting team. Source exceptions return to the source steward. The editable feedback paths are regenerated from their named owners when the deck is rebuilt. Moving objects manually in PowerPoint does not reattach the paths.
 [SlidePoise sources]
-Generated target visual: /private/tmp/.slidepoise-rebuild-h51errnw/slides/s03-operating-model/work/accepted-slide.png
+Generated target visual: /Users/henry/Codes/AI_slide_drafting/examples/consulting-ai-transformation/run/slides/s03-operating-model/work/accepted-slide.png
 Canonical asset remix-file-search-line: /Users/henry/Codes/AI_slide_drafting/examples/consulting-ai-transformation/run/work/icon-cache/file-search/remix-file-search-line.svg
 Canonical asset remix-draft-line: /Users/henry/Codes/AI_slide_drafting/examples/consulting-ai-transformation/run/work/icon-cache/draft/remix-draft-line.svg
 Canonical asset remix-shield-check-line: /Users/henry/Codes/AI_slide_drafting/examples/consulting-ai-transformation/run/work/icon-cache/shield-check/remix-shield-check-line.svg
@@ -1229,8 +1229,8 @@
         </p:nvSpPr>
         <p:spPr>
           <a:xfrm>
-            <a:off x="5715000" y="4851400"/>
-            <a:ext cx="6350" cy="685800"/>
+            <a:off x="6083300" y="5054600"/>
+            <a:ext cx="6350" cy="615950"/>
           </a:xfrm>
           <a:prstGeom prst="rect">
             <a:avLst/>
@@ -1302,9 +1302,117 @@
           </a:ln>
         </p:spPr>
       </p:sp>
+      <p:sp>
+        <p:nvSpPr>
+          <p:cNvPr id="5" name="shared-controls-1-bullet"/>
+          <p:cNvSpPr/>
+          <p:nvPr/>
+        </p:nvSpPr>
+        <p:spPr>
+          <a:xfrm>
+            <a:off x="330200" y="5289550"/>
+            <a:ext cx="63500" cy="63500"/>
+          </a:xfrm>
+          <a:prstGeom prst="ellipse">
+            <a:avLst/>
+          </a:prstGeom>
+          <a:solidFill>
+            <a:srgbClr val="FD5108"/>
+          </a:solidFill>
+          <a:ln w="12700">
+            <a:solidFill>
+              <a:srgbClr val="FFFFFF">
+                <a:alpha val="0"/>
+              </a:srgbClr>
+            </a:solidFill>
+            <a:prstDash val="solid"/>
+          </a:ln>
+        </p:spPr>
+      </p:sp>
+      <p:sp>
+        <p:nvSpPr>
+          <p:cNvPr id="6" name="shared-controls-2-bullet"/>
+          <p:cNvSpPr/>
+          <p:nvPr/>
+        </p:nvSpPr>
+        <p:spPr>
+          <a:xfrm>
+            <a:off x="330200" y="5505450"/>
+            <a:ext cx="63500" cy="63500"/>
+          </a:xfrm>
+          <a:prstGeom prst="ellipse">
+            <a:avLst/>
+          </a:prstGeom>
+          <a:solidFill>
+            <a:srgbClr val="FD5108"/>
+          </a:solidFill>
+          <a:ln w="12700">
+            <a:solidFill>
+              <a:srgbClr val="FFFFFF">
+                <a:alpha val="0"/>
+              </a:srgbClr>
+            </a:solidFill>
+            <a:prstDash val="solid"/>
+          </a:ln>
+        </p:spPr>
+      </p:sp>
+      <p:sp>
+        <p:nvSpPr>
+          <p:cNvPr id="7" name="measurement-1-bullet"/>
+          <p:cNvSpPr/>
+          <p:nvPr/>
+        </p:nvSpPr>
+        <p:spPr>
+          <a:xfrm>
+            <a:off x="6369050" y="5289550"/>
+            <a:ext cx="63500" cy="63500"/>
+          </a:xfrm>
+          <a:prstGeom prst="ellipse">
+            <a:avLst/>
+          </a:prstGeom>
+          <a:solidFill>
+            <a:srgbClr val="FD5108"/>
+          </a:solidFill>
+          <a:ln w="12700">
+            <a:solidFill>
+              <a:srgbClr val="FFFFFF">
+                <a:alpha val="0"/>
+              </a:srgbClr>
+            </a:solidFill>
+            <a:prstDash val="solid"/>
+          </a:ln>
+        </p:spPr>
+      </p:sp>
+      <p:sp>
+        <p:nvSpPr>
+          <p:cNvPr id="8" name="measurement-2-bullet"/>
+          <p:cNvSpPr/>
+          <p:nvPr/>
+        </p:nvSpPr>
+        <p:spPr>
+          <a:xfrm>
+            <a:off x="6369050" y="5505450"/>
+            <a:ext cx="63500" cy="63500"/>
+          </a:xfrm>
+          <a:prstGeom prst="ellipse">
+            <a:avLst/>
+          </a:prstGeom>
+          <a:solidFill>
+            <a:srgbClr val="FD5108"/>
+          </a:solidFill>
+          <a:ln w="12700">
+            <a:solidFill>
+              <a:srgbClr val="FFFFFF">
+                <a:alpha val="0"/>
+              </a:srgbClr>
+            </a:solidFill>
+            <a:prstDash val="solid"/>
+          </a:ln>
+        </p:spPr>
+      </p:sp>
       <p:graphicFrame>
         <p:nvGraphicFramePr>
-          <p:cNvPr id="5" name="responsibility-matrix"/>
+          <p:cNvPr id="9" name="responsibility-matrix"/>
           <p:cNvGraphicFramePr>
             <a:graphicFrameLocks noGrp="1"/>
           </p:cNvGraphicFramePr>
@@ -1317,21 +1425,21 @@
           </p:nvPr>
         </p:nvGraphicFramePr>
         <p:xfrm>
-          <a:off x="215900" y="2832100"/>
-          <a:ext cx="11658600" cy="1905000"/>
+          <a:off x="215900" y="3035300"/>
+          <a:ext cx="11760200" cy="1892300"/>
         </p:xfrm>
         <a:graphic>
           <a:graphicData uri="http://schemas.openxmlformats.org/drawingml/2006/table">
             <a:tbl>
               <a:tblPr/>
               <a:tblGrid>
-                <a:gridCol w="1841500"/>
-                <a:gridCol w="2444750"/>
-                <a:gridCol w="2476500"/>
-                <a:gridCol w="2444750"/>
-                <a:gridCol w="2451100"/>
+                <a:gridCol w="1866900"/>
+                <a:gridCol w="2317750"/>
+                <a:gridCol w="2520950"/>
+                <a:gridCol w="2514600"/>
+                <a:gridCol w="2540000"/>
               </a:tblGrid>
-              <a:tr h="317500">
+              <a:tr h="330200">
                 <a:tc>
                   <a:txBody>
                     <a:bodyPr>
@@ -1342,14 +1450,14 @@
                       <a:pPr algn="l" indent="0" marL="0">
                         <a:buNone/>
                       </a:pPr>
-                      <a:endParaRPr lang="en-US" sz="950" dirty="0">
+                      <a:endParaRPr lang="en-US" sz="1200" dirty="0">
                         <a:latin typeface="Arial" charset="0"/>
                         <a:ea typeface="Arial" charset="0"/>
                         <a:cs typeface="Arial" charset="0"/>
                       </a:endParaRPr>
                     </a:p>
                   </a:txBody>
-                  <a:tcPr marL="101600" marR="101600" marT="38100" marB="38100" anchor="ctr">
+                  <a:tcPr marL="76200" marR="76200" marT="31750" marB="31750" anchor="ctr">
                     <a:lnL w="6350" cap="flat" cmpd="sng" algn="ctr">
                       <a:solidFill>
                         <a:srgbClr val="C6C9CD"/>
@@ -1398,11 +1506,11 @@
                     </a:bodyPr>
                     <a:lstStyle/>
                     <a:p>
-                      <a:pPr algn="ctr" indent="0" marL="0">
+                      <a:pPr algn="l" indent="0" marL="0">
                         <a:buNone/>
                       </a:pPr>
                       <a:r>
-                        <a:rPr lang="en-US" sz="950" b="1" dirty="0">
+                        <a:rPr lang="en-US" sz="1200" b="1" dirty="0">
                           <a:solidFill>
                             <a:srgbClr val="FFFFFF"/>
                           </a:solidFill>
@@ -1412,14 +1520,14 @@
                         </a:rPr>
                         <a:t>Approved sources</a:t>
                       </a:r>
-                      <a:endParaRPr lang="en-US" sz="950" dirty="0">
+                      <a:endParaRPr lang="en-US" sz="1200" dirty="0">
                         <a:latin typeface="Arial" charset="0"/>
                         <a:ea typeface="Arial" charset="0"/>
                         <a:cs typeface="Arial" charset="0"/>
                       </a:endParaRPr>
                     </a:p>
                   </a:txBody>
-                  <a:tcPr marL="101600" marR="101600" marT="38100" marB="38100" anchor="ctr">
+                  <a:tcPr marL="76200" marR="76200" marT="31750" marB="31750" anchor="ctr">
                     <a:lnL w="6350" cap="flat" cmpd="sng" algn="ctr">
                       <a:solidFill>
                         <a:srgbClr val="C6C9CD"/>
@@ -1468,11 +1576,11 @@
                     </a:bodyPr>
                     <a:lstStyle/>
                     <a:p>
-                      <a:pPr algn="ctr" indent="0" marL="0">
+                      <a:pPr algn="l" indent="0" marL="0">
                         <a:buNone/>
                       </a:pPr>
                       <a:r>
-                        <a:rPr lang="en-US" sz="950" b="1" dirty="0">
+                        <a:rPr lang="en-US" sz="1200" b="1" dirty="0">
                           <a:solidFill>
                             <a:srgbClr val="FFFFFF"/>
                           </a:solidFill>
@@ -1482,14 +1590,14 @@
                         </a:rPr>
                         <a:t>Grounded draft</a:t>
                       </a:r>
-                      <a:endParaRPr lang="en-US" sz="950" dirty="0">
+                      <a:endParaRPr lang="en-US" sz="1200" dirty="0">
                         <a:latin typeface="Arial" charset="0"/>
                         <a:ea typeface="Arial" charset="0"/>
                         <a:cs typeface="Arial" charset="0"/>
                       </a:endParaRPr>
                     </a:p>
                   </a:txBody>
-                  <a:tcPr marL="101600" marR="101600" marT="38100" marB="38100" anchor="ctr">
+                  <a:tcPr marL="76200" marR="76200" marT="31750" marB="31750" anchor="ctr">
                     <a:lnL w="6350" cap="flat" cmpd="sng" algn="ctr">
                       <a:solidFill>
                         <a:srgbClr val="C6C9CD"/>
@@ -1538,11 +1646,11 @@
                     </a:bodyPr>
                     <a:lstStyle/>
                     <a:p>
-                      <a:pPr algn="ctr" indent="0" marL="0">
+                      <a:pPr algn="l" indent="0" marL="0">
                         <a:buNone/>
                       </a:pPr>
                       <a:r>
-                        <a:rPr lang="en-US" sz="950" b="1" dirty="0">
+                        <a:rPr lang="en-US" sz="1200" b="1" dirty="0">
                           <a:solidFill>
                             <a:srgbClr val="FFFFFF"/>
                           </a:solidFill>
@@ -1552,14 +1660,14 @@
                         </a:rPr>
                         <a:t>Expert review</a:t>
                       </a:r>
-                      <a:endParaRPr lang="en-US" sz="950" dirty="0">
+                      <a:endParaRPr lang="en-US" sz="1200" dirty="0">
                         <a:latin typeface="Arial" charset="0"/>
                         <a:ea typeface="Arial" charset="0"/>
                         <a:cs typeface="Arial" charset="0"/>
                       </a:endParaRPr>
                     </a:p>
                   </a:txBody>
-                  <a:tcPr marL="101600" marR="101600" marT="38100" marB="38100" anchor="ctr">
+                  <a:tcPr marL="76200" marR="76200" marT="31750" marB="31750" anchor="ctr">
                     <a:lnL w="6350" cap="flat" cmpd="sng" algn="ctr">
                       <a:solidFill>
                         <a:srgbClr val="C6C9CD"/>
@@ -1608,11 +1716,11 @@
                     </a:bodyPr>
                     <a:lstStyle/>
                     <a:p>
-                      <a:pPr algn="ctr" indent="0" marL="0">
+                      <a:pPr algn="l" indent="0" marL="0">
                         <a:buNone/>
                       </a:pPr>
                       <a:r>
-                        <a:rPr lang="en-US" sz="950" b="1" dirty="0">
+                        <a:rPr lang="en-US" sz="1200" b="1" dirty="0">
                           <a:solidFill>
                             <a:srgbClr val="FFFFFF"/>
                           </a:solidFill>
@@ -1622,14 +1730,14 @@
                         </a:rPr>
                         <a:t>Client-ready output</a:t>
                       </a:r>
-                      <a:endParaRPr lang="en-US" sz="950" dirty="0">
+                      <a:endParaRPr lang="en-US" sz="1200" dirty="0">
                         <a:latin typeface="Arial" charset="0"/>
                         <a:ea typeface="Arial" charset="0"/>
                         <a:cs typeface="Arial" charset="0"/>
                       </a:endParaRPr>
                     </a:p>
                   </a:txBody>
-                  <a:tcPr marL="101600" marR="101600" marT="38100" marB="38100" anchor="ctr">
+                  <a:tcPr marL="76200" marR="76200" marT="31750" marB="31750" anchor="ctr">
                     <a:lnL w="6350" cap="flat" cmpd="sng" algn="ctr">
                       <a:solidFill>
                         <a:srgbClr val="C6C9CD"/>
@@ -1672,7 +1780,7 @@
                   </a:tcPr>
                 </a:tc>
               </a:tr>
-              <a:tr h="368300">
+              <a:tr h="330200">
                 <a:tc>
                   <a:txBody>
                     <a:bodyPr>
@@ -1684,7 +1792,7 @@
                         <a:buNone/>
                       </a:pPr>
                       <a:r>
-                        <a:rPr lang="en-US" sz="950" b="1" dirty="0">
+                        <a:rPr lang="en-US" sz="1200" b="1" dirty="0">
                           <a:solidFill>
                             <a:srgbClr val="000000"/>
                           </a:solidFill>
@@ -1694,14 +1802,14 @@
                         </a:rPr>
                         <a:t>INPUT</a:t>
                       </a:r>
-                      <a:endParaRPr lang="en-US" sz="950" dirty="0">
+                      <a:endParaRPr lang="en-US" sz="1200" dirty="0">
                         <a:latin typeface="Arial" charset="0"/>
                         <a:ea typeface="Arial" charset="0"/>
                         <a:cs typeface="Arial" charset="0"/>
                       </a:endParaRPr>
                     </a:p>
                   </a:txBody>
-                  <a:tcPr marL="101600" marR="101600" marT="38100" marB="38100" anchor="ctr">
+                  <a:tcPr marL="76200" marR="76200" marT="31750" marB="31750" anchor="ctr">
                     <a:lnL w="6350" cap="flat" cmpd="sng" algn="ctr">
                       <a:solidFill>
                         <a:srgbClr val="C6C9CD"/>
@@ -1750,11 +1858,11 @@
                     </a:bodyPr>
                     <a:lstStyle/>
                     <a:p>
-                      <a:pPr algn="ctr" indent="0" marL="0">
+                      <a:pPr algn="l" indent="0" marL="0">
                         <a:buNone/>
                       </a:pPr>
                       <a:r>
-                        <a:rPr lang="en-US" sz="950" dirty="0">
+                        <a:rPr lang="en-US" sz="1200" dirty="0">
                           <a:solidFill>
                             <a:srgbClr val="000000"/>
                           </a:solidFill>
@@ -1764,14 +1872,14 @@
                         </a:rPr>
                         <a:t>Corpus request</a:t>
                       </a:r>
-                      <a:endParaRPr lang="en-US" sz="950" dirty="0">
+                      <a:endParaRPr lang="en-US" sz="1200" dirty="0">
                         <a:latin typeface="Arial" charset="0"/>
                         <a:ea typeface="Arial" charset="0"/>
                         <a:cs typeface="Arial" charset="0"/>
                       </a:endParaRPr>
                     </a:p>
                   </a:txBody>
-                  <a:tcPr marL="101600" marR="101600" marT="38100" marB="38100" anchor="ctr">
+                  <a:tcPr marL="76200" marR="76200" marT="31750" marB="31750" anchor="ctr">
                     <a:lnL w="6350" cap="flat" cmpd="sng" algn="ctr">
                       <a:solidFill>
                         <a:srgbClr val="C6C9CD"/>
@@ -1820,11 +1928,11 @@
                     </a:bodyPr>
                     <a:lstStyle/>
                     <a:p>
-                      <a:pPr algn="ctr" indent="0" marL="0">
+                      <a:pPr algn="l" indent="0" marL="0">
                         <a:buNone/>
                       </a:pPr>
                       <a:r>
-                        <a:rPr lang="en-US" sz="950" dirty="0">
+                        <a:rPr lang="en-US" sz="1200" dirty="0">
                           <a:solidFill>
                             <a:srgbClr val="000000"/>
                           </a:solidFill>
@@ -1834,14 +1942,14 @@
                         </a:rPr>
                         <a:t>Source pack + task brief</a:t>
                       </a:r>
-                      <a:endParaRPr lang="en-US" sz="950" dirty="0">
+                      <a:endParaRPr lang="en-US" sz="1200" dirty="0">
                         <a:latin typeface="Arial" charset="0"/>
                         <a:ea typeface="Arial" charset="0"/>
                         <a:cs typeface="Arial" charset="0"/>
                       </a:endParaRPr>
                     </a:p>
                   </a:txBody>
-                  <a:tcPr marL="101600" marR="101600" marT="38100" marB="38100" anchor="ctr">
+                  <a:tcPr marL="76200" marR="76200" marT="31750" marB="31750" anchor="ctr">
                     <a:lnL w="6350" cap="flat" cmpd="sng" algn="ctr">
                       <a:solidFill>
                         <a:srgbClr val="C6C9CD"/>
@@ -1890,11 +1998,11 @@
                     </a:bodyPr>
                     <a:lstStyle/>
                     <a:p>
-                      <a:pPr algn="ctr" indent="0" marL="0">
+                      <a:pPr algn="l" indent="0" marL="0">
                         <a:buNone/>
                       </a:pPr>
                       <a:r>
-                        <a:rPr lang="en-US" sz="950" dirty="0">
+                        <a:rPr lang="en-US" sz="1200" dirty="0">
                           <a:solidFill>
                             <a:srgbClr val="000000"/>
                           </a:solidFill>
@@ -1904,14 +2012,14 @@
                         </a:rPr>
                         <a:t>Draft + evidence trail</a:t>
                       </a:r>
-                      <a:endParaRPr lang="en-US" sz="950" dirty="0">
+                      <a:endParaRPr lang="en-US" sz="1200" dirty="0">
                         <a:latin typeface="Arial" charset="0"/>
                         <a:ea typeface="Arial" charset="0"/>
                         <a:cs typeface="Arial" charset="0"/>
                       </a:endParaRPr>
                     </a:p>
                   </a:txBody>
-                  <a:tcPr marL="101600" marR="101600" marT="38100" marB="38100" anchor="ctr">
+                  <a:tcPr marL="76200" marR="76200" marT="31750" marB="31750" anchor="ctr">
                     <a:lnL w="6350" cap="flat" cmpd="sng" algn="ctr">
                       <a:solidFill>
                         <a:srgbClr val="C6C9CD"/>
@@ -1960,11 +2068,11 @@
                     </a:bodyPr>
                     <a:lstStyle/>
                     <a:p>
-                      <a:pPr algn="ctr" indent="0" marL="0">
+                      <a:pPr algn="l" indent="0" marL="0">
                         <a:buNone/>
                       </a:pPr>
                       <a:r>
-                        <a:rPr lang="en-US" sz="950" dirty="0">
+                        <a:rPr lang="en-US" sz="1200" dirty="0">
                           <a:solidFill>
                             <a:srgbClr val="000000"/>
                           </a:solidFill>
@@ -1974,14 +2082,14 @@
                         </a:rPr>
                         <a:t>Signed draft + resolved defects</a:t>
                       </a:r>
-                      <a:endParaRPr lang="en-US" sz="950" dirty="0">
+                      <a:endParaRPr lang="en-US" sz="1200" dirty="0">
                         <a:latin typeface="Arial" charset="0"/>
                         <a:ea typeface="Arial" charset="0"/>
                         <a:cs typeface="Arial" charset="0"/>
                       </a:endParaRPr>
                     </a:p>
                   </a:txBody>
-                  <a:tcPr marL="101600" marR="101600" marT="38100" marB="38100" anchor="ctr">
+                  <a:tcPr marL="76200" marR="76200" marT="31750" marB="31750" anchor="ctr">
                     <a:lnL w="6350" cap="flat" cmpd="sng" algn="ctr">
                       <a:solidFill>
                         <a:srgbClr val="C6C9CD"/>
@@ -2024,7 +2132,7 @@
                   </a:tcPr>
                 </a:tc>
               </a:tr>
-              <a:tr h="368300">
+              <a:tr h="355600">
                 <a:tc>
                   <a:txBody>
                     <a:bodyPr>
@@ -2036,7 +2144,7 @@
                         <a:buNone/>
                       </a:pPr>
                       <a:r>
-                        <a:rPr lang="en-US" sz="950" b="1" dirty="0">
+                        <a:rPr lang="en-US" sz="1200" b="1" dirty="0">
                           <a:solidFill>
                             <a:srgbClr val="000000"/>
                           </a:solidFill>
@@ -2046,14 +2154,14 @@
                         </a:rPr>
                         <a:t>OUTPUT</a:t>
                       </a:r>
-                      <a:endParaRPr lang="en-US" sz="950" dirty="0">
+                      <a:endParaRPr lang="en-US" sz="1200" dirty="0">
                         <a:latin typeface="Arial" charset="0"/>
                         <a:ea typeface="Arial" charset="0"/>
                         <a:cs typeface="Arial" charset="0"/>
                       </a:endParaRPr>
                     </a:p>
                   </a:txBody>
-                  <a:tcPr marL="101600" marR="101600" marT="38100" marB="38100" anchor="ctr">
+                  <a:tcPr marL="76200" marR="76200" marT="31750" marB="31750" anchor="ctr">
                     <a:lnL w="6350" cap="flat" cmpd="sng" algn="ctr">
                       <a:solidFill>
                         <a:srgbClr val="C6C9CD"/>
@@ -2102,11 +2210,11 @@
                     </a:bodyPr>
                     <a:lstStyle/>
                     <a:p>
-                      <a:pPr algn="ctr" indent="0" marL="0">
+                      <a:pPr algn="l" indent="0" marL="0">
                         <a:buNone/>
                       </a:pPr>
                       <a:r>
-                        <a:rPr lang="en-US" sz="950" dirty="0">
+                        <a:rPr lang="en-US" sz="1200" dirty="0">
                           <a:solidFill>
                             <a:srgbClr val="000000"/>
                           </a:solidFill>
@@ -2116,14 +2224,14 @@
                         </a:rPr>
                         <a:t>Versioned source pack</a:t>
                       </a:r>
-                      <a:endParaRPr lang="en-US" sz="950" dirty="0">
+                      <a:endParaRPr lang="en-US" sz="1200" dirty="0">
                         <a:latin typeface="Arial" charset="0"/>
                         <a:ea typeface="Arial" charset="0"/>
                         <a:cs typeface="Arial" charset="0"/>
                       </a:endParaRPr>
                     </a:p>
                   </a:txBody>
-                  <a:tcPr marL="101600" marR="101600" marT="38100" marB="38100" anchor="ctr">
+                  <a:tcPr marL="76200" marR="76200" marT="31750" marB="31750" anchor="ctr">
                     <a:lnL w="6350" cap="flat" cmpd="sng" algn="ctr">
                       <a:solidFill>
                         <a:srgbClr val="C6C9CD"/>
@@ -2172,11 +2280,11 @@
                     </a:bodyPr>
                     <a:lstStyle/>
                     <a:p>
-                      <a:pPr algn="ctr" indent="0" marL="0">
+                      <a:pPr algn="l" indent="0" marL="0">
                         <a:buNone/>
                       </a:pPr>
                       <a:r>
-                        <a:rPr lang="en-US" sz="950" dirty="0">
+                        <a:rPr lang="en-US" sz="1200" dirty="0">
                           <a:solidFill>
                             <a:srgbClr val="000000"/>
                           </a:solidFill>
@@ -2186,14 +2294,14 @@
                         </a:rPr>
                         <a:t>Cited draft + uncertainty flags</a:t>
                       </a:r>
-                      <a:endParaRPr lang="en-US" sz="950" dirty="0">
+                      <a:endParaRPr lang="en-US" sz="1200" dirty="0">
                         <a:latin typeface="Arial" charset="0"/>
                         <a:ea typeface="Arial" charset="0"/>
                         <a:cs typeface="Arial" charset="0"/>
                       </a:endParaRPr>
                     </a:p>
                   </a:txBody>
-                  <a:tcPr marL="101600" marR="101600" marT="38100" marB="38100" anchor="ctr">
+                  <a:tcPr marL="76200" marR="76200" marT="31750" marB="31750" anchor="ctr">
                     <a:lnL w="6350" cap="flat" cmpd="sng" algn="ctr">
                       <a:solidFill>
                         <a:srgbClr val="C6C9CD"/>
@@ -2242,11 +2350,11 @@
                     </a:bodyPr>
                     <a:lstStyle/>
                     <a:p>
-                      <a:pPr algn="ctr" indent="0" marL="0">
+                      <a:pPr algn="l" indent="0" marL="0">
                         <a:buNone/>
                       </a:pPr>
                       <a:r>
-                        <a:rPr lang="en-US" sz="950" dirty="0">
+                        <a:rPr lang="en-US" sz="1200" dirty="0">
                           <a:solidFill>
                             <a:srgbClr val="000000"/>
                           </a:solidFill>
@@ -2256,14 +2364,14 @@
                         </a:rPr>
                         <a:t>Signed review or defect log</a:t>
                       </a:r>
-                      <a:endParaRPr lang="en-US" sz="950" dirty="0">
+                      <a:endParaRPr lang="en-US" sz="1200" dirty="0">
                         <a:latin typeface="Arial" charset="0"/>
                         <a:ea typeface="Arial" charset="0"/>
                         <a:cs typeface="Arial" charset="0"/>
                       </a:endParaRPr>
                     </a:p>
                   </a:txBody>
-                  <a:tcPr marL="101600" marR="101600" marT="38100" marB="38100" anchor="ctr">
+                  <a:tcPr marL="76200" marR="76200" marT="31750" marB="31750" anchor="ctr">
                     <a:lnL w="6350" cap="flat" cmpd="sng" algn="ctr">
                       <a:solidFill>
                         <a:srgbClr val="C6C9CD"/>
@@ -2312,11 +2420,11 @@
                     </a:bodyPr>
                     <a:lstStyle/>
                     <a:p>
-                      <a:pPr algn="ctr" indent="0" marL="0">
+                      <a:pPr algn="l" indent="0" marL="0">
                         <a:buNone/>
                       </a:pPr>
                       <a:r>
-                        <a:rPr lang="en-US" sz="950" dirty="0">
+                        <a:rPr lang="en-US" sz="1200" dirty="0">
                           <a:solidFill>
                             <a:srgbClr val="000000"/>
                           </a:solidFill>
@@ -2326,14 +2434,14 @@
                         </a:rPr>
                         <a:t>Authorized client deliverable</a:t>
                       </a:r>
-                      <a:endParaRPr lang="en-US" sz="950" dirty="0">
+                      <a:endParaRPr lang="en-US" sz="1200" dirty="0">
                         <a:latin typeface="Arial" charset="0"/>
                         <a:ea typeface="Arial" charset="0"/>
                         <a:cs typeface="Arial" charset="0"/>
                       </a:endParaRPr>
                     </a:p>
                   </a:txBody>
-                  <a:tcPr marL="101600" marR="101600" marT="38100" marB="38100" anchor="ctr">
+                  <a:tcPr marL="76200" marR="76200" marT="31750" marB="31750" anchor="ctr">
                     <a:lnL w="6350" cap="flat" cmpd="sng" algn="ctr">
                       <a:solidFill>
                         <a:srgbClr val="C6C9CD"/>
@@ -2376,7 +2484,7 @@
                   </a:tcPr>
                 </a:tc>
               </a:tr>
-              <a:tr h="368300">
+              <a:tr h="336550">
                 <a:tc>
                   <a:txBody>
                     <a:bodyPr>
@@ -2388,7 +2496,7 @@
                         <a:buNone/>
                       </a:pPr>
                       <a:r>
-                        <a:rPr lang="en-US" sz="950" b="1" dirty="0">
+                        <a:rPr lang="en-US" sz="1200" b="1" dirty="0">
                           <a:solidFill>
                             <a:srgbClr val="000000"/>
                           </a:solidFill>
@@ -2398,14 +2506,14 @@
                         </a:rPr>
                         <a:t>OWNER</a:t>
                       </a:r>
-                      <a:endParaRPr lang="en-US" sz="950" dirty="0">
+                      <a:endParaRPr lang="en-US" sz="1200" dirty="0">
                         <a:latin typeface="Arial" charset="0"/>
                         <a:ea typeface="Arial" charset="0"/>
                         <a:cs typeface="Arial" charset="0"/>
                       </a:endParaRPr>
                     </a:p>
                   </a:txBody>
-                  <a:tcPr marL="101600" marR="101600" marT="38100" marB="38100" anchor="ctr">
+                  <a:tcPr marL="76200" marR="76200" marT="31750" marB="31750" anchor="ctr">
                     <a:lnL w="6350" cap="flat" cmpd="sng" algn="ctr">
                       <a:solidFill>
                         <a:srgbClr val="C6C9CD"/>
@@ -2454,11 +2562,11 @@
                     </a:bodyPr>
                     <a:lstStyle/>
                     <a:p>
-                      <a:pPr algn="ctr" indent="0" marL="0">
+                      <a:pPr algn="l" indent="0" marL="0">
                         <a:buNone/>
                       </a:pPr>
                       <a:r>
-                        <a:rPr lang="en-US" sz="950" dirty="0">
+                        <a:rPr lang="en-US" sz="1200" dirty="0">
                           <a:solidFill>
                             <a:srgbClr val="000000"/>
                           </a:solidFill>
@@ -2468,14 +2576,14 @@
                         </a:rPr>
                         <a:t>Source steward</a:t>
                       </a:r>
-                      <a:endParaRPr lang="en-US" sz="950" dirty="0">
+                      <a:endParaRPr lang="en-US" sz="1200" dirty="0">
                         <a:latin typeface="Arial" charset="0"/>
                         <a:ea typeface="Arial" charset="0"/>
                         <a:cs typeface="Arial" charset="0"/>
                       </a:endParaRPr>
                     </a:p>
                   </a:txBody>
-                  <a:tcPr marL="101600" marR="101600" marT="38100" marB="38100" anchor="ctr">
+                  <a:tcPr marL="76200" marR="76200" marT="31750" marB="31750" anchor="ctr">
                     <a:lnL w="6350" cap="flat" cmpd="sng" algn="ctr">
                       <a:solidFill>
                         <a:srgbClr val="C6C9CD"/>
@@ -2524,11 +2632,11 @@
                     </a:bodyPr>
                     <a:lstStyle/>
                     <a:p>
-                      <a:pPr algn="ctr" indent="0" marL="0">
+                      <a:pPr algn="l" indent="0" marL="0">
                         <a:buNone/>
                       </a:pPr>
                       <a:r>
-                        <a:rPr lang="en-US" sz="950" dirty="0">
+                        <a:rPr lang="en-US" sz="1200" dirty="0">
                           <a:solidFill>
                             <a:srgbClr val="000000"/>
                           </a:solidFill>
@@ -2538,14 +2646,14 @@
                         </a:rPr>
                         <a:t>Engagement team</a:t>
                       </a:r>
-                      <a:endParaRPr lang="en-US" sz="950" dirty="0">
+                      <a:endParaRPr lang="en-US" sz="1200" dirty="0">
                         <a:latin typeface="Arial" charset="0"/>
                         <a:ea typeface="Arial" charset="0"/>
                         <a:cs typeface="Arial" charset="0"/>
                       </a:endParaRPr>
                     </a:p>
                   </a:txBody>
-                  <a:tcPr marL="101600" marR="101600" marT="38100" marB="38100" anchor="ctr">
+                  <a:tcPr marL="76200" marR="76200" marT="31750" marB="31750" anchor="ctr">
                     <a:lnL w="6350" cap="flat" cmpd="sng" algn="ctr">
                       <a:solidFill>
                         <a:srgbClr val="C6C9CD"/>
@@ -2594,11 +2702,11 @@
                     </a:bodyPr>
                     <a:lstStyle/>
                     <a:p>
-                      <a:pPr algn="ctr" indent="0" marL="0">
+                      <a:pPr algn="l" indent="0" marL="0">
                         <a:buNone/>
                       </a:pPr>
                       <a:r>
-                        <a:rPr lang="en-US" sz="950" dirty="0">
+                        <a:rPr lang="en-US" sz="1200" dirty="0">
                           <a:solidFill>
                             <a:srgbClr val="000000"/>
                           </a:solidFill>
@@ -2608,14 +2716,14 @@
                         </a:rPr>
                         <a:t>Expert reviewer</a:t>
                       </a:r>
-                      <a:endParaRPr lang="en-US" sz="950" dirty="0">
+                      <a:endParaRPr lang="en-US" sz="1200" dirty="0">
                         <a:latin typeface="Arial" charset="0"/>
                         <a:ea typeface="Arial" charset="0"/>
                         <a:cs typeface="Arial" charset="0"/>
                       </a:endParaRPr>
                     </a:p>
                   </a:txBody>
-                  <a:tcPr marL="101600" marR="101600" marT="38100" marB="38100" anchor="ctr">
+                  <a:tcPr marL="76200" marR="76200" marT="31750" marB="31750" anchor="ctr">
                     <a:lnL w="6350" cap="flat" cmpd="sng" algn="ctr">
                       <a:solidFill>
                         <a:srgbClr val="C6C9CD"/>
@@ -2664,11 +2772,11 @@
                     </a:bodyPr>
                     <a:lstStyle/>
                     <a:p>
-                      <a:pPr algn="ctr" indent="0" marL="0">
+                      <a:pPr algn="l" indent="0" marL="0">
                         <a:buNone/>
                       </a:pPr>
                       <a:r>
-                        <a:rPr lang="en-US" sz="950" dirty="0">
+                        <a:rPr lang="en-US" sz="1200" dirty="0">
                           <a:solidFill>
                             <a:srgbClr val="000000"/>
                           </a:solidFill>
@@ -2678,14 +2786,14 @@
                         </a:rPr>
                         <a:t>Engagement lead</a:t>
                       </a:r>
-                      <a:endParaRPr lang="en-US" sz="950" dirty="0">
+                      <a:endParaRPr lang="en-US" sz="1200" dirty="0">
                         <a:latin typeface="Arial" charset="0"/>
                         <a:ea typeface="Arial" charset="0"/>
                         <a:cs typeface="Arial" charset="0"/>
                       </a:endParaRPr>
                     </a:p>
                   </a:txBody>
-                  <a:tcPr marL="101600" marR="101600" marT="38100" marB="38100" anchor="ctr">
+                  <a:tcPr marL="76200" marR="76200" marT="31750" marB="31750" anchor="ctr">
                     <a:lnL w="6350" cap="flat" cmpd="sng" algn="ctr">
                       <a:solidFill>
                         <a:srgbClr val="C6C9CD"/>
@@ -2728,7 +2836,7 @@
                   </a:tcPr>
                 </a:tc>
               </a:tr>
-              <a:tr h="482600">
+              <a:tr h="539750">
                 <a:tc>
                   <a:txBody>
                     <a:bodyPr>
@@ -2740,7 +2848,7 @@
                         <a:buNone/>
                       </a:pPr>
                       <a:r>
-                        <a:rPr lang="en-US" sz="950" b="1" dirty="0">
+                        <a:rPr lang="en-US" sz="1200" b="1" dirty="0">
                           <a:solidFill>
                             <a:srgbClr val="000000"/>
                           </a:solidFill>
@@ -2750,14 +2858,14 @@
                         </a:rPr>
                         <a:t>RELEASE CONTROL</a:t>
                       </a:r>
-                      <a:endParaRPr lang="en-US" sz="950" dirty="0">
+                      <a:endParaRPr lang="en-US" sz="1200" dirty="0">
                         <a:latin typeface="Arial" charset="0"/>
                         <a:ea typeface="Arial" charset="0"/>
                         <a:cs typeface="Arial" charset="0"/>
                       </a:endParaRPr>
                     </a:p>
                   </a:txBody>
-                  <a:tcPr marL="101600" marR="101600" marT="38100" marB="38100" anchor="ctr">
+                  <a:tcPr marL="76200" marR="76200" marT="31750" marB="31750" anchor="ctr">
                     <a:lnL w="6350" cap="flat" cmpd="sng" algn="ctr">
                       <a:solidFill>
                         <a:srgbClr val="C6C9CD"/>
@@ -2806,11 +2914,11 @@
                     </a:bodyPr>
                     <a:lstStyle/>
                     <a:p>
-                      <a:pPr algn="ctr" indent="0" marL="0">
+                      <a:pPr algn="l" indent="0" marL="0">
                         <a:buNone/>
                       </a:pPr>
                       <a:r>
-                        <a:rPr lang="en-US" sz="950" dirty="0">
+                        <a:rPr lang="en-US" sz="1200" dirty="0">
                           <a:solidFill>
                             <a:srgbClr val="000000"/>
                           </a:solidFill>
@@ -2820,18 +2928,18 @@
                         </a:rPr>
                         <a:t>Verify permissions</a:t>
                       </a:r>
-                      <a:endParaRPr lang="en-US" sz="950" dirty="0">
+                      <a:endParaRPr lang="en-US" sz="1200" dirty="0">
                         <a:latin typeface="Arial" charset="0"/>
                         <a:ea typeface="Arial" charset="0"/>
                         <a:cs typeface="Arial" charset="0"/>
                       </a:endParaRPr>
                     </a:p>
                     <a:p>
-                      <a:pPr algn="ctr" indent="0" marL="0">
+                      <a:pPr algn="l" indent="0" marL="0">
                         <a:buNone/>
                       </a:pPr>
                       <a:r>
-                        <a:rPr lang="en-US" sz="950" dirty="0">
+                        <a:rPr lang="en-US" sz="1200" dirty="0">
                           <a:solidFill>
                             <a:srgbClr val="000000"/>
                           </a:solidFill>
@@ -2841,14 +2949,14 @@
                         </a:rPr>
                         <a:t>and dates</a:t>
                       </a:r>
-                      <a:endParaRPr lang="en-US" sz="950" dirty="0">
+                      <a:endParaRPr lang="en-US" sz="1200" dirty="0">
                         <a:latin typeface="Arial" charset="0"/>
                         <a:ea typeface="Arial" charset="0"/>
                         <a:cs typeface="Arial" charset="0"/>
                       </a:endParaRPr>
                     </a:p>
                   </a:txBody>
-                  <a:tcPr marL="101600" marR="101600" marT="38100" marB="38100" anchor="ctr">
+                  <a:tcPr marL="76200" marR="76200" marT="31750" marB="31750" anchor="ctr">
                     <a:lnL w="6350" cap="flat" cmpd="sng" algn="ctr">
                       <a:solidFill>
                         <a:srgbClr val="C6C9CD"/>
@@ -2897,11 +3005,11 @@
                     </a:bodyPr>
                     <a:lstStyle/>
                     <a:p>
-                      <a:pPr algn="ctr" indent="0" marL="0">
+                      <a:pPr algn="l" indent="0" marL="0">
                         <a:buNone/>
                       </a:pPr>
                       <a:r>
-                        <a:rPr lang="en-US" sz="950" dirty="0">
+                        <a:rPr lang="en-US" sz="1200" dirty="0">
                           <a:solidFill>
                             <a:srgbClr val="000000"/>
                           </a:solidFill>
@@ -2911,18 +3019,18 @@
                         </a:rPr>
                         <a:t>Check citations</a:t>
                       </a:r>
-                      <a:endParaRPr lang="en-US" sz="950" dirty="0">
+                      <a:endParaRPr lang="en-US" sz="1200" dirty="0">
                         <a:latin typeface="Arial" charset="0"/>
                         <a:ea typeface="Arial" charset="0"/>
                         <a:cs typeface="Arial" charset="0"/>
                       </a:endParaRPr>
                     </a:p>
                     <a:p>
-                      <a:pPr algn="ctr" indent="0" marL="0">
+                      <a:pPr algn="l" indent="0" marL="0">
                         <a:buNone/>
                       </a:pPr>
                       <a:r>
-                        <a:rPr lang="en-US" sz="950" dirty="0">
+                        <a:rPr lang="en-US" sz="1200" dirty="0">
                           <a:solidFill>
                             <a:srgbClr val="000000"/>
                           </a:solidFill>
@@ -2932,14 +3040,14 @@
                         </a:rPr>
                         <a:t>and evidence gaps</a:t>
                       </a:r>
-                      <a:endParaRPr lang="en-US" sz="950" dirty="0">
+                      <a:endParaRPr lang="en-US" sz="1200" dirty="0">
                         <a:latin typeface="Arial" charset="0"/>
                         <a:ea typeface="Arial" charset="0"/>
                         <a:cs typeface="Arial" charset="0"/>
                       </a:endParaRPr>
                     </a:p>
                   </a:txBody>
-                  <a:tcPr marL="101600" marR="101600" marT="38100" marB="38100" anchor="ctr">
+                  <a:tcPr marL="76200" marR="76200" marT="31750" marB="31750" anchor="ctr">
                     <a:lnL w="6350" cap="flat" cmpd="sng" algn="ctr">
                       <a:solidFill>
                         <a:srgbClr val="C6C9CD"/>
@@ -2988,11 +3096,11 @@
                     </a:bodyPr>
                     <a:lstStyle/>
                     <a:p>
-                      <a:pPr algn="ctr" indent="0" marL="0">
+                      <a:pPr algn="l" indent="0" marL="0">
                         <a:buNone/>
                       </a:pPr>
                       <a:r>
-                        <a:rPr lang="en-US" sz="950" dirty="0">
+                        <a:rPr lang="en-US" sz="1200" dirty="0">
                           <a:solidFill>
                             <a:srgbClr val="000000"/>
                           </a:solidFill>
@@ -3002,18 +3110,18 @@
                         </a:rPr>
                         <a:t>Validate claims</a:t>
                       </a:r>
-                      <a:endParaRPr lang="en-US" sz="950" dirty="0">
+                      <a:endParaRPr lang="en-US" sz="1200" dirty="0">
                         <a:latin typeface="Arial" charset="0"/>
                         <a:ea typeface="Arial" charset="0"/>
                         <a:cs typeface="Arial" charset="0"/>
                       </a:endParaRPr>
                     </a:p>
                     <a:p>
-                      <a:pPr algn="ctr" indent="0" marL="0">
+                      <a:pPr algn="l" indent="0" marL="0">
                         <a:buNone/>
                       </a:pPr>
                       <a:r>
-                        <a:rPr lang="en-US" sz="950" dirty="0">
+                        <a:rPr lang="en-US" sz="1200" dirty="0">
                           <a:solidFill>
                             <a:srgbClr val="000000"/>
                           </a:solidFill>
@@ -3023,14 +3131,14 @@
                         </a:rPr>
                         <a:t>and quality</a:t>
                       </a:r>
-                      <a:endParaRPr lang="en-US" sz="950" dirty="0">
+                      <a:endParaRPr lang="en-US" sz="1200" dirty="0">
                         <a:latin typeface="Arial" charset="0"/>
                         <a:ea typeface="Arial" charset="0"/>
                         <a:cs typeface="Arial" charset="0"/>
                       </a:endParaRPr>
                     </a:p>
                   </a:txBody>
-                  <a:tcPr marL="101600" marR="101600" marT="38100" marB="38100" anchor="ctr">
+                  <a:tcPr marL="76200" marR="76200" marT="31750" marB="31750" anchor="ctr">
                     <a:lnL w="6350" cap="flat" cmpd="sng" algn="ctr">
                       <a:solidFill>
                         <a:srgbClr val="C6C9CD"/>
@@ -3079,11 +3187,11 @@
                     </a:bodyPr>
                     <a:lstStyle/>
                     <a:p>
-                      <a:pPr algn="ctr" indent="0" marL="0">
+                      <a:pPr algn="l" indent="0" marL="0">
                         <a:buNone/>
                       </a:pPr>
                       <a:r>
-                        <a:rPr lang="en-US" sz="950" dirty="0">
+                        <a:rPr lang="en-US" sz="1200" dirty="0">
                           <a:solidFill>
                             <a:srgbClr val="000000"/>
                           </a:solidFill>
@@ -3093,18 +3201,18 @@
                         </a:rPr>
                         <a:t>Confirm release</a:t>
                       </a:r>
-                      <a:endParaRPr lang="en-US" sz="950" dirty="0">
+                      <a:endParaRPr lang="en-US" sz="1200" dirty="0">
                         <a:latin typeface="Arial" charset="0"/>
                         <a:ea typeface="Arial" charset="0"/>
                         <a:cs typeface="Arial" charset="0"/>
                       </a:endParaRPr>
                     </a:p>
                     <a:p>
-                      <a:pPr algn="ctr" indent="0" marL="0">
+                      <a:pPr algn="l" indent="0" marL="0">
                         <a:buNone/>
                       </a:pPr>
                       <a:r>
-                        <a:rPr lang="en-US" sz="950" dirty="0">
+                        <a:rPr lang="en-US" sz="1200" dirty="0">
                           <a:solidFill>
                             <a:srgbClr val="000000"/>
                           </a:solidFill>
@@ -3114,14 +3222,14 @@
                         </a:rPr>
                         <a:t>approval</a:t>
                       </a:r>
-                      <a:endParaRPr lang="en-US" sz="950" dirty="0">
+                      <a:endParaRPr lang="en-US" sz="1200" dirty="0">
                         <a:latin typeface="Arial" charset="0"/>
                         <a:ea typeface="Arial" charset="0"/>
                         <a:cs typeface="Arial" charset="0"/>
                       </a:endParaRPr>
                     </a:p>
                   </a:txBody>
-                  <a:tcPr marL="101600" marR="101600" marT="38100" marB="38100" anchor="ctr">
+                  <a:tcPr marL="76200" marR="76200" marT="31750" marB="31750" anchor="ctr">
                     <a:lnL w="6350" cap="flat" cmpd="sng" algn="ctr">
                       <a:solidFill>
                         <a:srgbClr val="C6C9CD"/>
@@ -3170,14 +3278,14 @@
       </p:graphicFrame>
       <p:cxnSp>
         <p:nvCxnSpPr>
-          <p:cNvPr id="6" name="SC_CONNECTOR__forward-1__0"/>
+          <p:cNvPr id="10" name="SC_CONNECTOR__forward-1__0"/>
           <p:cNvCxnSpPr/>
           <p:nvPr/>
         </p:nvCxnSpPr>
         <p:spPr>
           <a:xfrm>
-            <a:off x="1892300" y="1949450"/>
-            <a:ext cx="2247900" cy="0"/>
+            <a:off x="2139950" y="2159000"/>
+            <a:ext cx="2197100" cy="0"/>
           </a:xfrm>
           <a:prstGeom prst="line">
             <a:avLst/>
@@ -3196,14 +3304,14 @@
       </p:cxnSp>
       <p:cxnSp>
         <p:nvCxnSpPr>
-          <p:cNvPr id="7" name="SC_CONNECTOR__forward-2__0"/>
+          <p:cNvPr id="11" name="SC_CONNECTOR__forward-2__0"/>
           <p:cNvCxnSpPr/>
           <p:nvPr/>
         </p:nvCxnSpPr>
         <p:spPr>
           <a:xfrm>
-            <a:off x="4622800" y="1949450"/>
-            <a:ext cx="2660650" cy="0"/>
+            <a:off x="4997450" y="2159000"/>
+            <a:ext cx="2292350" cy="0"/>
           </a:xfrm>
           <a:prstGeom prst="line">
             <a:avLst/>
@@ -3222,14 +3330,14 @@
       </p:cxnSp>
       <p:cxnSp>
         <p:nvCxnSpPr>
-          <p:cNvPr id="8" name="SC_CONNECTOR__forward-3__0"/>
+          <p:cNvPr id="12" name="SC_CONNECTOR__forward-3__0"/>
           <p:cNvCxnSpPr/>
           <p:nvPr/>
         </p:nvCxnSpPr>
         <p:spPr>
           <a:xfrm>
-            <a:off x="7766050" y="1949450"/>
-            <a:ext cx="2216150" cy="0"/>
+            <a:off x="7950200" y="2159000"/>
+            <a:ext cx="2101850" cy="0"/>
           </a:xfrm>
           <a:prstGeom prst="line">
             <a:avLst/>
@@ -3248,7 +3356,107 @@
       </p:cxnSp>
       <p:sp>
         <p:nvSpPr>
-          <p:cNvPr id="9" name="headline"/>
+          <p:cNvPr id="13" name="SC_FREEFORM_ROUTE__source-return__0"/>
+          <p:cNvSpPr/>
+          <p:nvPr/>
+        </p:nvSpPr>
+        <p:spPr>
+          <a:xfrm>
+            <a:off x="1809750" y="1612900"/>
+            <a:ext cx="2758440" cy="215900"/>
+          </a:xfrm>
+          <a:custGeom>
+            <a:avLst/>
+            <a:gdLst/>
+            <a:ahLst/>
+            <a:cxnLst/>
+            <a:rect l="l" t="t" r="r" b="b"/>
+            <a:pathLst>
+              <a:path w="2758440" h="215900">
+                <a:moveTo>
+                  <a:pt x="2758440" y="215900"/>
+                </a:moveTo>
+                <a:lnTo>
+                  <a:pt x="2758440" y="0"/>
+                </a:lnTo>
+                <a:lnTo>
+                  <a:pt x="0" y="0"/>
+                </a:lnTo>
+                <a:lnTo>
+                  <a:pt x="0" y="215900"/>
+                </a:lnTo>
+              </a:path>
+            </a:pathLst>
+          </a:custGeom>
+          <a:solidFill>
+            <a:srgbClr val="FFFFFF">
+              <a:alpha val="0"/>
+            </a:srgbClr>
+          </a:solidFill>
+          <a:ln w="19050">
+            <a:solidFill>
+              <a:srgbClr val="FD5108"/>
+            </a:solidFill>
+            <a:prstDash val="solid"/>
+            <a:round/>
+            <a:headEnd type="none"/>
+            <a:tailEnd type="triangle" w="lg" len="lg"/>
+          </a:ln>
+        </p:spPr>
+      </p:sp>
+      <p:sp>
+        <p:nvSpPr>
+          <p:cNvPr id="14" name="SC_FREEFORM_ROUTE__review-return__0"/>
+          <p:cNvSpPr/>
+          <p:nvPr/>
+        </p:nvSpPr>
+        <p:spPr>
+          <a:xfrm>
+            <a:off x="4832350" y="1612900"/>
+            <a:ext cx="2787650" cy="215900"/>
+          </a:xfrm>
+          <a:custGeom>
+            <a:avLst/>
+            <a:gdLst/>
+            <a:ahLst/>
+            <a:cxnLst/>
+            <a:rect l="l" t="t" r="r" b="b"/>
+            <a:pathLst>
+              <a:path w="2787650" h="215900">
+                <a:moveTo>
+                  <a:pt x="2787650" y="215900"/>
+                </a:moveTo>
+                <a:lnTo>
+                  <a:pt x="2787650" y="0"/>
+                </a:lnTo>
+                <a:lnTo>
+                  <a:pt x="0" y="0"/>
+                </a:lnTo>
+                <a:lnTo>
+                  <a:pt x="0" y="215900"/>
+                </a:lnTo>
+              </a:path>
+            </a:pathLst>
+          </a:custGeom>
+          <a:solidFill>
+            <a:srgbClr val="FFFFFF">
+              <a:alpha val="0"/>
+            </a:srgbClr>
+          </a:solidFill>
+          <a:ln w="19050">
+            <a:solidFill>
+              <a:srgbClr val="FD5108"/>
+            </a:solidFill>
+            <a:prstDash val="solid"/>
+            <a:round/>
+            <a:headEnd type="none"/>
+            <a:tailEnd type="triangle" w="lg" len="lg"/>
+          </a:ln>
+        </p:spPr>
+      </p:sp>
+      <p:sp>
+        <p:nvSpPr>
+          <p:cNvPr id="15" name="headline"/>
           <p:cNvSpPr txBox="1"/>
           <p:nvPr/>
         </p:nvSpPr>
@@ -3293,7 +3501,7 @@
       </p:sp>
       <p:sp>
         <p:nvSpPr>
-          <p:cNvPr id="10" name="subtitle"/>
+          <p:cNvPr id="16" name="subtitle"/>
           <p:cNvSpPr txBox="1"/>
           <p:nvPr/>
         </p:nvSpPr>
@@ -3338,14 +3546,14 @@
       </p:sp>
       <p:sp>
         <p:nvSpPr>
-          <p:cNvPr id="11" name="stage-label-sources"/>
+          <p:cNvPr id="17" name="stage-label-sources"/>
           <p:cNvSpPr txBox="1"/>
           <p:nvPr/>
         </p:nvSpPr>
         <p:spPr>
           <a:xfrm>
-            <a:off x="635000" y="2387600"/>
-            <a:ext cx="2032000" cy="266700"/>
+            <a:off x="603250" y="2635250"/>
+            <a:ext cx="2413000" cy="273050"/>
           </a:xfrm>
           <a:prstGeom prst="rect">
             <a:avLst/>
@@ -3367,7 +3575,7 @@
               <a:defRPr spc="0"/>
             </a:pPr>
             <a:r>
-              <a:rPr lang="en-US" sz="1250" b="1" dirty="0" spc="0">
+              <a:rPr lang="en-US" sz="1400" b="1" dirty="0" spc="0">
                 <a:solidFill>
                   <a:srgbClr val="000000"/>
                 </a:solidFill>
@@ -3377,20 +3585,20 @@
               </a:rPr>
               <a:t>Approved sources</a:t>
             </a:r>
-            <a:endParaRPr lang="en-US" sz="1250" dirty="0" spc="0"/>
+            <a:endParaRPr lang="en-US" sz="1400" dirty="0" spc="0"/>
           </a:p>
         </p:txBody>
       </p:sp>
       <p:sp>
         <p:nvSpPr>
-          <p:cNvPr id="12" name="stage-label-draft"/>
+          <p:cNvPr id="18" name="stage-label-draft"/>
           <p:cNvSpPr txBox="1"/>
           <p:nvPr/>
         </p:nvSpPr>
         <p:spPr>
           <a:xfrm>
-            <a:off x="3365500" y="2387600"/>
-            <a:ext cx="2032000" cy="266700"/>
+            <a:off x="3460750" y="2635250"/>
+            <a:ext cx="2413000" cy="273050"/>
           </a:xfrm>
           <a:prstGeom prst="rect">
             <a:avLst/>
@@ -3412,7 +3620,7 @@
               <a:defRPr spc="0"/>
             </a:pPr>
             <a:r>
-              <a:rPr lang="en-US" sz="1250" b="1" dirty="0" spc="0">
+              <a:rPr lang="en-US" sz="1400" b="1" dirty="0" spc="0">
                 <a:solidFill>
                   <a:srgbClr val="000000"/>
                 </a:solidFill>
@@ -3422,20 +3630,20 @@
               </a:rPr>
               <a:t>Grounded draft</a:t>
             </a:r>
-            <a:endParaRPr lang="en-US" sz="1250" dirty="0" spc="0"/>
+            <a:endParaRPr lang="en-US" sz="1400" dirty="0" spc="0"/>
           </a:p>
         </p:txBody>
       </p:sp>
       <p:sp>
         <p:nvSpPr>
-          <p:cNvPr id="13" name="stage-label-review"/>
+          <p:cNvPr id="19" name="stage-label-review"/>
           <p:cNvSpPr txBox="1"/>
           <p:nvPr/>
         </p:nvSpPr>
         <p:spPr>
           <a:xfrm>
-            <a:off x="6508750" y="2387600"/>
-            <a:ext cx="2032000" cy="266700"/>
+            <a:off x="6413500" y="2635250"/>
+            <a:ext cx="2413000" cy="273050"/>
           </a:xfrm>
           <a:prstGeom prst="rect">
             <a:avLst/>
@@ -3457,7 +3665,7 @@
               <a:defRPr spc="0"/>
             </a:pPr>
             <a:r>
-              <a:rPr lang="en-US" sz="1250" b="1" dirty="0" spc="0">
+              <a:rPr lang="en-US" sz="1400" b="1" dirty="0" spc="0">
                 <a:solidFill>
                   <a:srgbClr val="000000"/>
                 </a:solidFill>
@@ -3467,20 +3675,20 @@
               </a:rPr>
               <a:t>Expert review</a:t>
             </a:r>
-            <a:endParaRPr lang="en-US" sz="1250" dirty="0" spc="0"/>
+            <a:endParaRPr lang="en-US" sz="1400" dirty="0" spc="0"/>
           </a:p>
         </p:txBody>
       </p:sp>
       <p:sp>
         <p:nvSpPr>
-          <p:cNvPr id="14" name="stage-label-output"/>
+          <p:cNvPr id="20" name="stage-label-output"/>
           <p:cNvSpPr txBox="1"/>
           <p:nvPr/>
         </p:nvSpPr>
         <p:spPr>
           <a:xfrm>
-            <a:off x="9207500" y="2387600"/>
-            <a:ext cx="2032000" cy="266700"/>
+            <a:off x="9175750" y="2635250"/>
+            <a:ext cx="2413000" cy="273050"/>
           </a:xfrm>
           <a:prstGeom prst="rect">
             <a:avLst/>
@@ -3502,7 +3710,7 @@
               <a:defRPr spc="0"/>
             </a:pPr>
             <a:r>
-              <a:rPr lang="en-US" sz="1250" b="1" dirty="0" spc="0">
+              <a:rPr lang="en-US" sz="1400" b="1" dirty="0" spc="0">
                 <a:solidFill>
                   <a:srgbClr val="000000"/>
                 </a:solidFill>
@@ -3512,20 +3720,20 @@
               </a:rPr>
               <a:t>Client-ready output</a:t>
             </a:r>
-            <a:endParaRPr lang="en-US" sz="1250" dirty="0" spc="0"/>
+            <a:endParaRPr lang="en-US" sz="1400" dirty="0" spc="0"/>
           </a:p>
         </p:txBody>
       </p:sp>
       <p:sp>
         <p:nvSpPr>
-          <p:cNvPr id="15" name="source-return-label"/>
+          <p:cNvPr id="21" name="source-return-label"/>
           <p:cNvSpPr txBox="1"/>
           <p:nvPr/>
         </p:nvSpPr>
         <p:spPr>
           <a:xfrm>
-            <a:off x="1905000" y="1365250"/>
-            <a:ext cx="2730500" cy="203200"/>
+            <a:off x="2019300" y="1365250"/>
+            <a:ext cx="2527300" cy="209550"/>
           </a:xfrm>
           <a:prstGeom prst="rect">
             <a:avLst/>
@@ -3547,7 +3755,7 @@
               <a:defRPr spc="0"/>
             </a:pPr>
             <a:r>
-              <a:rPr lang="en-US" sz="1050" b="1" dirty="0" spc="0">
+              <a:rPr lang="en-US" sz="1000" b="1" dirty="0" spc="0">
                 <a:solidFill>
                   <a:srgbClr val="000000"/>
                 </a:solidFill>
@@ -3557,20 +3765,20 @@
               </a:rPr>
               <a:t>Correct sources via exception register</a:t>
             </a:r>
-            <a:endParaRPr lang="en-US" sz="1050" dirty="0" spc="0"/>
+            <a:endParaRPr lang="en-US" sz="1000" dirty="0" spc="0"/>
           </a:p>
         </p:txBody>
       </p:sp>
       <p:sp>
         <p:nvSpPr>
-          <p:cNvPr id="16" name="review-return-label"/>
+          <p:cNvPr id="22" name="review-return-label"/>
           <p:cNvSpPr txBox="1"/>
           <p:nvPr/>
         </p:nvSpPr>
         <p:spPr>
           <a:xfrm>
-            <a:off x="5016500" y="1365250"/>
-            <a:ext cx="2730500" cy="203200"/>
+            <a:off x="5060950" y="1365250"/>
+            <a:ext cx="2571750" cy="209550"/>
           </a:xfrm>
           <a:prstGeom prst="rect">
             <a:avLst/>
@@ -3592,7 +3800,7 @@
               <a:defRPr spc="0"/>
             </a:pPr>
             <a:r>
-              <a:rPr lang="en-US" sz="1050" b="1" dirty="0" spc="0">
+              <a:rPr lang="en-US" sz="1000" b="1" dirty="0" spc="0">
                 <a:solidFill>
                   <a:srgbClr val="000000"/>
                 </a:solidFill>
@@ -3602,20 +3810,20 @@
               </a:rPr>
               <a:t>Reject with defect reasons</a:t>
             </a:r>
-            <a:endParaRPr lang="en-US" sz="1050" dirty="0" spc="0"/>
+            <a:endParaRPr lang="en-US" sz="1000" dirty="0" spc="0"/>
           </a:p>
         </p:txBody>
       </p:sp>
       <p:sp>
         <p:nvSpPr>
-          <p:cNvPr id="17" name="shared-controls-heading"/>
+          <p:cNvPr id="23" name="shared-controls-heading"/>
           <p:cNvSpPr txBox="1"/>
           <p:nvPr/>
         </p:nvSpPr>
         <p:spPr>
           <a:xfrm>
-            <a:off x="292100" y="4851400"/>
-            <a:ext cx="5016500" cy="222250"/>
+            <a:off x="292100" y="4978400"/>
+            <a:ext cx="5016500" cy="228600"/>
           </a:xfrm>
           <a:prstGeom prst="rect">
             <a:avLst/>
@@ -3637,7 +3845,7 @@
               <a:defRPr spc="0"/>
             </a:pPr>
             <a:r>
-              <a:rPr lang="en-US" sz="1250" b="1" dirty="0" spc="0">
+              <a:rPr lang="en-US" sz="1400" b="1" dirty="0" spc="0">
                 <a:solidFill>
                   <a:srgbClr val="000000"/>
                 </a:solidFill>
@@ -3647,86 +3855,20 @@
               </a:rPr>
               <a:t>SHARED CONTROLS</a:t>
             </a:r>
-            <a:endParaRPr lang="en-US" sz="1250" dirty="0" spc="0"/>
+            <a:endParaRPr lang="en-US" sz="1400" dirty="0" spc="0"/>
           </a:p>
         </p:txBody>
       </p:sp>
       <p:sp>
         <p:nvSpPr>
-          <p:cNvPr id="18" name="shared-controls"/>
+          <p:cNvPr id="24" name="measurement-heading"/>
           <p:cNvSpPr txBox="1"/>
           <p:nvPr/>
         </p:nvSpPr>
         <p:spPr>
           <a:xfrm>
-            <a:off x="292100" y="5092700"/>
-            <a:ext cx="5080000" cy="444500"/>
-          </a:xfrm>
-          <a:prstGeom prst="rect">
-            <a:avLst/>
-          </a:prstGeom>
-          <a:noFill/>
-          <a:ln/>
-        </p:spPr>
-        <p:txBody>
-          <a:bodyPr wrap="square" lIns="12700" tIns="12700" rIns="12700" bIns="12700" rtlCol="0" anchor="t">
-            <a:noAutofit/>
-          </a:bodyPr>
-          <a:lstStyle/>
-          <a:p>
-            <a:pPr algn="l" indent="0" marL="0">
-              <a:lnSpc>
-                <a:spcPct val="115000"/>
-              </a:lnSpc>
-              <a:buNone/>
-              <a:defRPr spc="0"/>
-            </a:pPr>
-            <a:r>
-              <a:rPr lang="en-US" sz="1050" dirty="0" spc="0">
-                <a:solidFill>
-                  <a:srgbClr val="000000"/>
-                </a:solidFill>
-                <a:latin typeface="Arial" pitchFamily="34" charset="0"/>
-                <a:ea typeface="Arial" pitchFamily="34" charset="-122"/>
-                <a:cs typeface="Arial" pitchFamily="34" charset="-120"/>
-              </a:rPr>
-              <a:t>• One register records defects, owners and disposition.</a:t>
-            </a:r>
-            <a:endParaRPr lang="en-US" sz="1050" dirty="0" spc="0"/>
-          </a:p>
-          <a:p>
-            <a:pPr algn="l" indent="0" marL="0">
-              <a:lnSpc>
-                <a:spcPct val="115000"/>
-              </a:lnSpc>
-              <a:buNone/>
-              <a:defRPr spc="0"/>
-            </a:pPr>
-            <a:r>
-              <a:rPr lang="en-US" sz="1050" dirty="0" spc="0">
-                <a:solidFill>
-                  <a:srgbClr val="000000"/>
-                </a:solidFill>
-                <a:latin typeface="Arial" pitchFamily="34" charset="0"/>
-                <a:ea typeface="Arial" pitchFamily="34" charset="-122"/>
-                <a:cs typeface="Arial" pitchFamily="34" charset="-120"/>
-              </a:rPr>
-              <a:t>• Platform team maintains access controls and audit logs.</a:t>
-            </a:r>
-            <a:endParaRPr lang="en-US" sz="1050" dirty="0" spc="0"/>
-          </a:p>
-        </p:txBody>
-      </p:sp>
-      <p:sp>
-        <p:nvSpPr>
-          <p:cNvPr id="19" name="measurement-heading"/>
-          <p:cNvSpPr txBox="1"/>
-          <p:nvPr/>
-        </p:nvSpPr>
-        <p:spPr>
-          <a:xfrm>
-            <a:off x="6000750" y="4851400"/>
-            <a:ext cx="5397500" cy="222250"/>
+            <a:off x="6350000" y="4978400"/>
+            <a:ext cx="5524500" cy="228600"/>
           </a:xfrm>
           <a:prstGeom prst="rect">
             <a:avLst/>
@@ -3748,7 +3890,7 @@
               <a:defRPr spc="0"/>
             </a:pPr>
             <a:r>
-              <a:rPr lang="en-US" sz="1250" b="1" dirty="0" spc="0">
+              <a:rPr lang="en-US" sz="1400" b="1" dirty="0" spc="0">
                 <a:solidFill>
                   <a:srgbClr val="000000"/>
                 </a:solidFill>
@@ -3758,79 +3900,13 @@
               </a:rPr>
               <a:t>PILOT MEASUREMENT</a:t>
             </a:r>
-            <a:endParaRPr lang="en-US" sz="1250" dirty="0" spc="0"/>
+            <a:endParaRPr lang="en-US" sz="1400" dirty="0" spc="0"/>
           </a:p>
         </p:txBody>
       </p:sp>
       <p:sp>
         <p:nvSpPr>
-          <p:cNvPr id="20" name="measurement"/>
-          <p:cNvSpPr txBox="1"/>
-          <p:nvPr/>
-        </p:nvSpPr>
-        <p:spPr>
-          <a:xfrm>
-            <a:off x="6000750" y="5092700"/>
-            <a:ext cx="5397500" cy="444500"/>
-          </a:xfrm>
-          <a:prstGeom prst="rect">
-            <a:avLst/>
-          </a:prstGeom>
-          <a:noFill/>
-          <a:ln/>
-        </p:spPr>
-        <p:txBody>
-          <a:bodyPr wrap="square" lIns="12700" tIns="12700" rIns="12700" bIns="12700" rtlCol="0" anchor="t">
-            <a:noAutofit/>
-          </a:bodyPr>
-          <a:lstStyle/>
-          <a:p>
-            <a:pPr algn="l" indent="0" marL="0">
-              <a:lnSpc>
-                <a:spcPct val="115000"/>
-              </a:lnSpc>
-              <a:buNone/>
-              <a:defRPr spc="0"/>
-            </a:pPr>
-            <a:r>
-              <a:rPr lang="en-US" sz="1050" dirty="0" spc="0">
-                <a:solidFill>
-                  <a:srgbClr val="000000"/>
-                </a:solidFill>
-                <a:latin typeface="Arial" pitchFamily="34" charset="0"/>
-                <a:ea typeface="Arial" pitchFamily="34" charset="-122"/>
-                <a:cs typeface="Arial" pitchFamily="34" charset="-120"/>
-              </a:rPr>
-              <a:t>• Compare 20 paired tasks with baseline time logs.</a:t>
-            </a:r>
-            <a:endParaRPr lang="en-US" sz="1050" dirty="0" spc="0"/>
-          </a:p>
-          <a:p>
-            <a:pPr algn="l" indent="0" marL="0">
-              <a:lnSpc>
-                <a:spcPct val="115000"/>
-              </a:lnSpc>
-              <a:buNone/>
-              <a:defRPr spc="0"/>
-            </a:pPr>
-            <a:r>
-              <a:rPr lang="en-US" sz="1050" dirty="0" spc="0">
-                <a:solidFill>
-                  <a:srgbClr val="000000"/>
-                </a:solidFill>
-                <a:latin typeface="Arial" pitchFamily="34" charset="0"/>
-                <a:ea typeface="Arial" pitchFamily="34" charset="-122"/>
-                <a:cs typeface="Arial" pitchFamily="34" charset="-120"/>
-              </a:rPr>
-              <a:t>• Verify claim samples and record expert review effort.</a:t>
-            </a:r>
-            <a:endParaRPr lang="en-US" sz="1050" dirty="0" spc="0"/>
-          </a:p>
-        </p:txBody>
-      </p:sp>
-      <p:sp>
-        <p:nvSpPr>
-          <p:cNvPr id="21" name="decision-label"/>
+          <p:cNvPr id="25" name="decision-label"/>
           <p:cNvSpPr txBox="1"/>
           <p:nvPr/>
         </p:nvSpPr>
@@ -3875,7 +3951,7 @@
       </p:sp>
       <p:sp>
         <p:nvSpPr>
-          <p:cNvPr id="22" name="decision-message"/>
+          <p:cNvPr id="26" name="decision-message"/>
           <p:cNvSpPr txBox="1"/>
           <p:nvPr/>
         </p:nvSpPr>
@@ -3918,9 +3994,189 @@
           </a:p>
         </p:txBody>
       </p:sp>
+      <p:sp>
+        <p:nvSpPr>
+          <p:cNvPr id="27" name="shared-controls-1"/>
+          <p:cNvSpPr txBox="1"/>
+          <p:nvPr/>
+        </p:nvSpPr>
+        <p:spPr>
+          <a:xfrm>
+            <a:off x="552450" y="5226050"/>
+            <a:ext cx="5372100" cy="215900"/>
+          </a:xfrm>
+          <a:prstGeom prst="rect">
+            <a:avLst/>
+          </a:prstGeom>
+          <a:noFill/>
+          <a:ln/>
+        </p:spPr>
+        <p:txBody>
+          <a:bodyPr wrap="square" lIns="12700" tIns="12700" rIns="12700" bIns="12700" rtlCol="0" anchor="t">
+            <a:noAutofit/>
+          </a:bodyPr>
+          <a:lstStyle/>
+          <a:p>
+            <a:pPr algn="l" indent="0" marL="0">
+              <a:lnSpc>
+                <a:spcPct val="115000"/>
+              </a:lnSpc>
+              <a:buNone/>
+              <a:defRPr spc="0"/>
+            </a:pPr>
+            <a:r>
+              <a:rPr lang="en-US" sz="1200" dirty="0" spc="0">
+                <a:solidFill>
+                  <a:srgbClr val="000000"/>
+                </a:solidFill>
+                <a:latin typeface="Arial" pitchFamily="34" charset="0"/>
+                <a:ea typeface="Arial" pitchFamily="34" charset="-122"/>
+                <a:cs typeface="Arial" pitchFamily="34" charset="-120"/>
+              </a:rPr>
+              <a:t>One register records defects, owners and disposition.</a:t>
+            </a:r>
+            <a:endParaRPr lang="en-US" sz="1200" dirty="0" spc="0"/>
+          </a:p>
+        </p:txBody>
+      </p:sp>
+      <p:sp>
+        <p:nvSpPr>
+          <p:cNvPr id="28" name="shared-controls-2"/>
+          <p:cNvSpPr txBox="1"/>
+          <p:nvPr/>
+        </p:nvSpPr>
+        <p:spPr>
+          <a:xfrm>
+            <a:off x="552450" y="5441950"/>
+            <a:ext cx="5372100" cy="215900"/>
+          </a:xfrm>
+          <a:prstGeom prst="rect">
+            <a:avLst/>
+          </a:prstGeom>
+          <a:noFill/>
+          <a:ln/>
+        </p:spPr>
+        <p:txBody>
+          <a:bodyPr wrap="square" lIns="12700" tIns="12700" rIns="12700" bIns="12700" rtlCol="0" anchor="t">
+            <a:noAutofit/>
+          </a:bodyPr>
+          <a:lstStyle/>
+          <a:p>
+            <a:pPr algn="l" indent="0" marL="0">
+              <a:lnSpc>
+                <a:spcPct val="115000"/>
+              </a:lnSpc>
+              <a:buNone/>
+              <a:defRPr spc="0"/>
+            </a:pPr>
+            <a:r>
+              <a:rPr lang="en-US" sz="1200" dirty="0" spc="0">
+                <a:solidFill>
+                  <a:srgbClr val="000000"/>
+                </a:solidFill>
+                <a:latin typeface="Arial" pitchFamily="34" charset="0"/>
+                <a:ea typeface="Arial" pitchFamily="34" charset="-122"/>
+                <a:cs typeface="Arial" pitchFamily="34" charset="-120"/>
+              </a:rPr>
+              <a:t>Platform team maintains access controls and audit logs.</a:t>
+            </a:r>
+            <a:endParaRPr lang="en-US" sz="1200" dirty="0" spc="0"/>
+          </a:p>
+        </p:txBody>
+      </p:sp>
+      <p:sp>
+        <p:nvSpPr>
+          <p:cNvPr id="29" name="measurement-1"/>
+          <p:cNvSpPr txBox="1"/>
+          <p:nvPr/>
+        </p:nvSpPr>
+        <p:spPr>
+          <a:xfrm>
+            <a:off x="6591300" y="5226050"/>
+            <a:ext cx="5302250" cy="215900"/>
+          </a:xfrm>
+          <a:prstGeom prst="rect">
+            <a:avLst/>
+          </a:prstGeom>
+          <a:noFill/>
+          <a:ln/>
+        </p:spPr>
+        <p:txBody>
+          <a:bodyPr wrap="square" lIns="12700" tIns="12700" rIns="12700" bIns="12700" rtlCol="0" anchor="t">
+            <a:noAutofit/>
+          </a:bodyPr>
+          <a:lstStyle/>
+          <a:p>
+            <a:pPr algn="l" indent="0" marL="0">
+              <a:lnSpc>
+                <a:spcPct val="115000"/>
+              </a:lnSpc>
+              <a:buNone/>
+              <a:defRPr spc="0"/>
+            </a:pPr>
+            <a:r>
+              <a:rPr lang="en-US" sz="1200" dirty="0" spc="0">
+                <a:solidFill>
+                  <a:srgbClr val="000000"/>
+                </a:solidFill>
+                <a:latin typeface="Arial" pitchFamily="34" charset="0"/>
+                <a:ea typeface="Arial" pitchFamily="34" charset="-122"/>
+                <a:cs typeface="Arial" pitchFamily="34" charset="-120"/>
+              </a:rPr>
+              <a:t>Compare 20 paired tasks with baseline time logs.</a:t>
+            </a:r>
+            <a:endParaRPr lang="en-US" sz="1200" dirty="0" spc="0"/>
+          </a:p>
+        </p:txBody>
+      </p:sp>
+      <p:sp>
+        <p:nvSpPr>
+          <p:cNvPr id="30" name="measurement-2"/>
+          <p:cNvSpPr txBox="1"/>
+          <p:nvPr/>
+        </p:nvSpPr>
+        <p:spPr>
+          <a:xfrm>
+            <a:off x="6591300" y="5441950"/>
+            <a:ext cx="5302250" cy="215900"/>
+          </a:xfrm>
+          <a:prstGeom prst="rect">
+            <a:avLst/>
+          </a:prstGeom>
+          <a:noFill/>
+          <a:ln/>
+        </p:spPr>
+        <p:txBody>
+          <a:bodyPr wrap="square" lIns="12700" tIns="12700" rIns="12700" bIns="12700" rtlCol="0" anchor="t">
+            <a:noAutofit/>
+          </a:bodyPr>
+          <a:lstStyle/>
+          <a:p>
+            <a:pPr algn="l" indent="0" marL="0">
+              <a:lnSpc>
+                <a:spcPct val="115000"/>
+              </a:lnSpc>
+              <a:buNone/>
+              <a:defRPr spc="0"/>
+            </a:pPr>
+            <a:r>
+              <a:rPr lang="en-US" sz="1200" dirty="0" spc="0">
+                <a:solidFill>
+                  <a:srgbClr val="000000"/>
+                </a:solidFill>
+                <a:latin typeface="Arial" pitchFamily="34" charset="0"/>
+                <a:ea typeface="Arial" pitchFamily="34" charset="-122"/>
+                <a:cs typeface="Arial" pitchFamily="34" charset="-120"/>
+              </a:rPr>
+              <a:t>Verify claim samples and record expert review effort.</a:t>
+            </a:r>
+            <a:endParaRPr lang="en-US" sz="1200" dirty="0" spc="0"/>
+          </a:p>
+        </p:txBody>
+      </p:sp>
       <p:pic>
         <p:nvPicPr>
-          <p:cNvPr id="23" name="stage-icon-sources" descr="remix-file-search-line">    </p:cNvPr>
+          <p:cNvPr id="31" name="stage-icon-sources" descr="remix-file-search-line">    </p:cNvPr>
           <p:cNvPicPr>
             <a:picLocks noChangeAspect="1"/>
           </p:cNvPicPr>
@@ -3940,8 +4196,8 @@
         </p:blipFill>
         <p:spPr>
           <a:xfrm>
-            <a:off x="1428750" y="1727200"/>
-            <a:ext cx="444500" cy="444500"/>
+            <a:off x="1504950" y="1854200"/>
+            <a:ext cx="609600" cy="609600"/>
           </a:xfrm>
           <a:prstGeom prst="rect">
             <a:avLst/>
@@ -3950,7 +4206,7 @@
       </p:pic>
       <p:pic>
         <p:nvPicPr>
-          <p:cNvPr id="24" name="stage-icon-draft" descr="remix-draft-line">    </p:cNvPr>
+          <p:cNvPr id="32" name="stage-icon-draft" descr="remix-draft-line">    </p:cNvPr>
           <p:cNvPicPr>
             <a:picLocks noChangeAspect="1"/>
           </p:cNvPicPr>
@@ -3970,8 +4226,8 @@
         </p:blipFill>
         <p:spPr>
           <a:xfrm>
-            <a:off x="4159250" y="1727200"/>
-            <a:ext cx="444500" cy="444500"/>
+            <a:off x="4362450" y="1854200"/>
+            <a:ext cx="609600" cy="609600"/>
           </a:xfrm>
           <a:prstGeom prst="rect">
             <a:avLst/>
@@ -3980,7 +4236,7 @@
       </p:pic>
       <p:pic>
         <p:nvPicPr>
-          <p:cNvPr id="25" name="stage-icon-review" descr="remix-shield-check-line">    </p:cNvPr>
+          <p:cNvPr id="33" name="stage-icon-review" descr="remix-shield-check-line">    </p:cNvPr>
           <p:cNvPicPr>
             <a:picLocks noChangeAspect="1"/>
           </p:cNvPicPr>
@@ -4000,8 +4256,8 @@
         </p:blipFill>
         <p:spPr>
           <a:xfrm>
-            <a:off x="7302500" y="1727200"/>
-            <a:ext cx="444500" cy="444500"/>
+            <a:off x="7315200" y="1854200"/>
+            <a:ext cx="609600" cy="609600"/>
           </a:xfrm>
           <a:prstGeom prst="rect">
             <a:avLst/>
@@ -4010,7 +4266,7 @@
       </p:pic>
       <p:pic>
         <p:nvPicPr>
-          <p:cNvPr id="26" name="stage-icon-output" descr="remix-send-plane-2-line">    </p:cNvPr>
+          <p:cNvPr id="34" name="stage-icon-output" descr="remix-send-plane-2-line">    </p:cNvPr>
           <p:cNvPicPr>
             <a:picLocks noChangeAspect="1"/>
           </p:cNvPicPr>
@@ -4030,8 +4286,8 @@
         </p:blipFill>
         <p:spPr>
           <a:xfrm>
-            <a:off x="10001250" y="1727200"/>
-            <a:ext cx="444500" cy="444500"/>
+            <a:off x="10077450" y="1854200"/>
+            <a:ext cx="609600" cy="609600"/>
           </a:xfrm>
           <a:prstGeom prst="rect">
             <a:avLst/>
@@ -4040,7 +4296,7 @@
       </p:pic>
       <p:sp>
         <p:nvSpPr>
-          <p:cNvPr id="27" name="Slide Number Placeholder 0"/>
+          <p:cNvPr id="35" name="Slide Number Placeholder 0"/>
           <p:cNvSpPr>
             <a:spLocks noGrp="1"/>
           </p:cNvSpPr>
